--- a/data/2026-09-13/slides.pptx
+++ b/data/2026-09-13/slides.pptx
@@ -513,7 +513,7 @@
           </a:p>
           <a:p>
             <a:r>
-              <a:t>대본: JAK 억제제 오늘 나온 최신 연구를 정리했습니다</a:t>
+              <a:t>대본: 90% 이 숫자, 탈모 연구가 새로 내놨습니다</a:t>
             </a:r>
           </a:p>
           <a:p>
@@ -593,7 +593,7 @@
           </a:p>
           <a:p>
             <a:r>
-              <a:t>대본: 《Journal of the American Academy of Dermatology》 - Pediatric Alopecia Areata and JAK Inhibitors: Bridging the Gap Between Evidence and Practice</a:t>
+              <a:t>대본: 《Journal of the American Academy of Dermatology》 - Dose optimization of deuruxolitinib in adults with alopecia areata: A phase 2 randomized trial</a:t>
             </a:r>
           </a:p>
           <a:p>
@@ -673,7 +673,7 @@
           </a:p>
           <a:p>
             <a:r>
-              <a:t>대본: Alopecia areata (AA) is a chronic immune-mediated disorder characterized by nonscarring hair loss that frequently begins in childhood and is associated with substantial psychosocial burden.</a:t>
+              <a:t>대본: Objective: To evaluate the efficacy and safety of the Janus kinase 1/2 inhibitor deuruxolitinib dosed 8 mg twice daily (BID) or 16 mg once daily (QD) in adults with severe AA.</a:t>
             </a:r>
           </a:p>
           <a:p>
@@ -753,7 +753,7 @@
           </a:p>
           <a:p>
             <a:r>
-              <a:t>대본: Therapeutic options for pediatric AA remain limited, particularly for patients with extensive or treatment-resistant disease.</a:t>
+              <a:t>대본: Methods: In this phase 2 study (NCT03811912), patients were randomized to deuruxolitinib 8 mg BID or 16 mg QD.</a:t>
             </a:r>
           </a:p>
           <a:p>
@@ -3997,7 +3997,7 @@
                 </a:solidFill>
                 <a:latin typeface="Arial"/>
               </a:rPr>
-              <a:t>JAK 억제제</a:t>
+              <a:t>90%</a:t>
             </a:r>
           </a:p>
         </p:txBody>
@@ -4032,7 +4032,7 @@
                 </a:solidFill>
                 <a:latin typeface="Arial"/>
               </a:rPr>
-              <a:t>오늘 나온 최신 연구를 정리했습니다</a:t>
+              <a:t>이 숫자, 탈모 연구가 새로 내놨습니다</a:t>
             </a:r>
           </a:p>
         </p:txBody>
@@ -4152,7 +4152,7 @@
                 </a:solidFill>
                 <a:latin typeface="Arial"/>
               </a:rPr>
-              <a:t>Pediatric Alopecia Areata and JAK Inhibitors: Bridging the Gap Between Evidence and Practice</a:t>
+              <a:t>Dose optimization of deuruxolitinib in adults with alopecia areata: A phase 2 randomized trial</a:t>
             </a:r>
           </a:p>
         </p:txBody>
@@ -4316,7 +4316,7 @@
                 </a:solidFill>
                 <a:latin typeface="Arial"/>
               </a:rPr>
-              <a:t>Alopecia areata (AA) is a chronic immune-mediated disorder characterized by nonscarring hair loss that frequently begins in childhood and is associated with substantial psychosocial burden.</a:t>
+              <a:t>Objective: To evaluate the efficacy and safety of the Janus kinase 1/2 inhibitor deuruxolitinib dosed 8 mg twice daily (BID) or 16 mg once daily (QD) in adults with severe AA.</a:t>
             </a:r>
           </a:p>
         </p:txBody>
@@ -4445,7 +4445,7 @@
                 </a:solidFill>
                 <a:latin typeface="Arial"/>
               </a:rPr>
-              <a:t>Therapeutic options for pediatric AA remain limited, particularly for patients with extensive or treatment-resistant disease.</a:t>
+              <a:t>Methods: In this phase 2 study (NCT03811912), patients were randomized to deuruxolitinib 8 mg BID or 16 mg QD.</a:t>
             </a:r>
           </a:p>
         </p:txBody>
@@ -4732,9 +4732,9 @@
                 <a:latin typeface="Arial"/>
               </a:rPr>
               <a:t>[출처]
-논문: Pediatric Alopecia Areata and JAK Inhibitors: Bridging the Gap Between Evidence and Practice
+논문: Dose optimization of deuruxolitinib in adults with alopecia areata: A phase 2 randomized trial
 게재: Journal of the American Academy of Dermatology
-원문: https://pubmed.ncbi.nlm.nih.gov/42727783/
+원문: https://pubmed.ncbi.nlm.nih.gov/42727780/
 [이미지 출처]
 - Male pattern baldness.jpg / Originally uploaded by Lkinkade (Transferred by XenonX3) / CC BY-SA 2.5
   https://commons.wikimedia.org/wiki/File:Male_pattern_baldness.jpg

--- a/data/2026-09-13/slides.pptx
+++ b/data/2026-09-13/slides.pptx
@@ -12,6 +12,7 @@
     <p:sldId id="260" r:id="rId12"/>
     <p:sldId id="261" r:id="rId13"/>
     <p:sldId id="262" r:id="rId14"/>
+    <p:sldId id="263" r:id="rId15"/>
   </p:sldIdLst>
   <p:sldSz cx="5559552" cy="9875520" type="screen4x3"/>
   <p:notesSz cx="6858000" cy="9144000"/>
@@ -513,7 +514,7 @@
           </a:p>
           <a:p>
             <a:r>
-              <a:t>대본: 90% 이 숫자, 탈모 연구가 새로 내놨습니다</a:t>
+              <a:t>대본: 모발 재생 오늘 나온 최신 연구를 정리했습니다</a:t>
             </a:r>
           </a:p>
           <a:p>
@@ -593,7 +594,7 @@
           </a:p>
           <a:p>
             <a:r>
-              <a:t>대본: 《Journal of the American Academy of Dermatology》 - Dose optimization of deuruxolitinib in adults with alopecia areata: A phase 2 randomized trial</a:t>
+              <a:t>대본: 《The Journal of investigative dermatology》 - Contact hypersensitivity promotes hair regeneration through SPP1-secreting macrophages</a:t>
             </a:r>
           </a:p>
           <a:p>
@@ -673,7 +674,7 @@
           </a:p>
           <a:p>
             <a:r>
-              <a:t>대본: Objective: To evaluate the efficacy and safety of the Janus kinase 1/2 inhibitor deuruxolitinib dosed 8 mg twice daily (BID) or 16 mg once daily (QD) in adults with severe AA.</a:t>
+              <a:t>대본: Allergic contact dermatitis, or contact hypersensitivity (CHS), is a pathological adaptive immune response that paradoxically induces hair regeneration, yet its underlying mechanisms remain unclear.</a:t>
             </a:r>
           </a:p>
           <a:p>
@@ -753,7 +754,7 @@
           </a:p>
           <a:p>
             <a:r>
-              <a:t>대본: Methods: In this phase 2 study (NCT03811912), patients were randomized to deuruxolitinib 8 mg BID or 16 mg QD.</a:t>
+              <a:t>대본: We integrated high-resolution spatial transcriptomics and single-cell RNA sequencing to map the intricate interactions between immune cells, stroma, and hair follicles during CHS-induced hair growth in mice.</a:t>
             </a:r>
           </a:p>
           <a:p>
@@ -919,6 +920,81 @@
           <a:p>
             <a:r>
               <a:t>연출 노트: 원문 링크는 고정 댓글로 안내.</a:t>
+            </a:r>
+          </a:p>
+        </p:txBody>
+      </p:sp>
+      <p:sp>
+        <p:nvSpPr>
+          <p:cNvPr id="4" name="Slide Number Placeholder 3"/>
+          <p:cNvSpPr>
+            <a:spLocks noGrp="1"/>
+          </p:cNvSpPr>
+          <p:nvPr>
+            <p:ph type="sldNum" idx="5" sz="quarter"/>
+          </p:nvPr>
+        </p:nvSpPr>
+        <p:spPr/>
+      </p:sp>
+    </p:spTree>
+  </p:cSld>
+  <p:clrMapOvr>
+    <a:masterClrMapping/>
+  </p:clrMapOvr>
+</p:notes>
+</file>
+
+<file path=ppt/notesSlides/notesSlide7.xml><?xml version="1.0" encoding="utf-8"?>
+<p:notes xmlns:a="http://schemas.openxmlformats.org/drawingml/2006/main" xmlns:p="http://schemas.openxmlformats.org/presentationml/2006/main" xmlns:r="http://schemas.openxmlformats.org/officeDocument/2006/relationships">
+  <p:cSld>
+    <p:spTree>
+      <p:nvGrpSpPr>
+        <p:cNvPr id="1" name=""/>
+        <p:cNvGrpSpPr/>
+        <p:nvPr/>
+      </p:nvGrpSpPr>
+      <p:grpSpPr>
+        <a:xfrm>
+          <a:off x="0" y="0"/>
+          <a:ext cx="0" cy="0"/>
+          <a:chOff x="0" y="0"/>
+          <a:chExt cx="0" cy="0"/>
+        </a:xfrm>
+      </p:grpSpPr>
+      <p:sp>
+        <p:nvSpPr>
+          <p:cNvPr id="2" name="Slide Image Placeholder 1"/>
+          <p:cNvSpPr>
+            <a:spLocks noGrp="1"/>
+          </p:cNvSpPr>
+          <p:nvPr>
+            <p:ph type="sldImg" idx="2"/>
+          </p:nvPr>
+        </p:nvSpPr>
+        <p:spPr/>
+      </p:sp>
+      <p:sp>
+        <p:nvSpPr>
+          <p:cNvPr id="3" name="Notes Placeholder 2"/>
+          <p:cNvSpPr>
+            <a:spLocks noGrp="1"/>
+          </p:cNvSpPr>
+          <p:nvPr>
+            <p:ph type="body" idx="3" sz="quarter"/>
+          </p:nvPr>
+        </p:nvSpPr>
+        <p:spPr/>
+        <p:txBody>
+          <a:bodyPr/>
+          <a:lstStyle/>
+          <a:p>
+            <a:r>
+              <a:t>편집 참고용 슬라이드입니다. 영상에는 쓰지 않아도 됩니다.</a:t>
+            </a:r>
+          </a:p>
+          <a:p>
+            <a:r>
+              <a:t>원문 영어 문장을 그대로 발췌했으므로 번역·검수 후 사용하세요.</a:t>
             </a:r>
           </a:p>
         </p:txBody>
@@ -3962,7 +4038,7 @@
                 </a:solidFill>
                 <a:latin typeface="Arial"/>
               </a:rPr>
-              <a:t>JOURNAL OF THE AMERICAN ACADEMY OF DERMA</a:t>
+              <a:t>THE JOURNAL OF INVESTIGATIVE DERMATOLOGY</a:t>
             </a:r>
           </a:p>
         </p:txBody>
@@ -3997,7 +4073,7 @@
                 </a:solidFill>
                 <a:latin typeface="Arial"/>
               </a:rPr>
-              <a:t>90%</a:t>
+              <a:t>모발 재생</a:t>
             </a:r>
           </a:p>
         </p:txBody>
@@ -4032,7 +4108,7 @@
                 </a:solidFill>
                 <a:latin typeface="Arial"/>
               </a:rPr>
-              <a:t>이 숫자, 탈모 연구가 새로 내놨습니다</a:t>
+              <a:t>오늘 나온 최신 연구를 정리했습니다</a:t>
             </a:r>
           </a:p>
         </p:txBody>
@@ -4152,7 +4228,7 @@
                 </a:solidFill>
                 <a:latin typeface="Arial"/>
               </a:rPr>
-              <a:t>Dose optimization of deuruxolitinib in adults with alopecia areata: A phase 2 randomized trial</a:t>
+              <a:t>Contact hypersensitivity promotes hair regeneration through SPP1-secreting macrophages</a:t>
             </a:r>
           </a:p>
         </p:txBody>
@@ -4187,7 +4263,7 @@
                 </a:solidFill>
                 <a:latin typeface="Arial"/>
               </a:rPr>
-              <a:t>Journal of the American Academy of Dermatology  ·  2026 Sep 11</a:t>
+              <a:t>The Journal of investigative dermatology  ·  2026 Sep 11</a:t>
             </a:r>
           </a:p>
         </p:txBody>
@@ -4316,7 +4392,7 @@
                 </a:solidFill>
                 <a:latin typeface="Arial"/>
               </a:rPr>
-              <a:t>Objective: To evaluate the efficacy and safety of the Janus kinase 1/2 inhibitor deuruxolitinib dosed 8 mg twice daily (BID) or 16 mg once daily (QD) in adults with severe AA.</a:t>
+              <a:t>Allergic contact dermatitis, or contact hypersensitivity (CHS), is a pathological adaptive immune response that paradoxically induces hair regeneration, yet its underlying mechanisms remain unclear.</a:t>
             </a:r>
           </a:p>
         </p:txBody>
@@ -4445,7 +4521,7 @@
                 </a:solidFill>
                 <a:latin typeface="Arial"/>
               </a:rPr>
-              <a:t>Methods: In this phase 2 study (NCT03811912), patients were randomized to deuruxolitinib 8 mg BID or 16 mg QD.</a:t>
+              <a:t>We integrated high-resolution spatial transcriptomics and single-cell RNA sequencing to map the intricate interactions between immune cells, stroma, and hair follicles during CHS-induced hair growth in mice.</a:t>
             </a:r>
           </a:p>
         </p:txBody>
@@ -4674,6 +4750,144 @@
         </p:nvSpPr>
         <p:spPr>
           <a:xfrm>
+            <a:off x="365760" y="457200"/>
+            <a:ext cx="4828032" cy="457200"/>
+          </a:xfrm>
+          <a:prstGeom prst="rect">
+            <a:avLst/>
+          </a:prstGeom>
+          <a:noFill/>
+        </p:spPr>
+        <p:txBody>
+          <a:bodyPr wrap="square" anchor="ctr">
+            <a:spAutoFit/>
+          </a:bodyPr>
+          <a:lstStyle/>
+          <a:p>
+            <a:pPr algn="l"/>
+            <a:r>
+              <a:rPr sz="1600" b="1">
+                <a:solidFill>
+                  <a:srgbClr val="FF6B6B"/>
+                </a:solidFill>
+                <a:latin typeface="Arial"/>
+              </a:rPr>
+              <a:t>본문 요약 (편집용)</a:t>
+            </a:r>
+          </a:p>
+        </p:txBody>
+      </p:sp>
+      <p:sp>
+        <p:nvSpPr>
+          <p:cNvPr id="3" name="TextBox 2"/>
+          <p:cNvSpPr txBox="1"/>
+          <p:nvPr/>
+        </p:nvSpPr>
+        <p:spPr>
+          <a:xfrm>
+            <a:off x="365760" y="1097280"/>
+            <a:ext cx="4828032" cy="457200"/>
+          </a:xfrm>
+          <a:prstGeom prst="rect">
+            <a:avLst/>
+          </a:prstGeom>
+          <a:noFill/>
+        </p:spPr>
+        <p:txBody>
+          <a:bodyPr wrap="square" anchor="t">
+            <a:spAutoFit/>
+          </a:bodyPr>
+          <a:lstStyle/>
+          <a:p>
+            <a:pPr algn="l"/>
+            <a:r>
+              <a:rPr sz="1300" b="1">
+                <a:solidFill>
+                  <a:srgbClr val="FFFFFF"/>
+                </a:solidFill>
+                <a:latin typeface="Arial"/>
+              </a:rPr>
+              <a:t>◆ 초록 요약 — Abstract</a:t>
+            </a:r>
+          </a:p>
+        </p:txBody>
+      </p:sp>
+      <p:sp>
+        <p:nvSpPr>
+          <p:cNvPr id="4" name="TextBox 3"/>
+          <p:cNvSpPr txBox="1"/>
+          <p:nvPr/>
+        </p:nvSpPr>
+        <p:spPr>
+          <a:xfrm>
+            <a:off x="457200" y="1600200"/>
+            <a:ext cx="4736592" cy="3566160"/>
+          </a:xfrm>
+          <a:prstGeom prst="rect">
+            <a:avLst/>
+          </a:prstGeom>
+          <a:noFill/>
+        </p:spPr>
+        <p:txBody>
+          <a:bodyPr wrap="square" anchor="t">
+            <a:spAutoFit/>
+          </a:bodyPr>
+          <a:lstStyle/>
+          <a:p>
+            <a:pPr algn="l"/>
+            <a:r>
+              <a:rPr sz="1000" b="0">
+                <a:solidFill>
+                  <a:srgbClr val="D5D8EA"/>
+                </a:solidFill>
+                <a:latin typeface="Arial"/>
+              </a:rPr>
+              <a:t>· Allergic contact dermatitis, or contact hypersensitivity (CHS), is a pathological adaptive immune response that paradoxically induces hair regeneration, yet its underlying mechanisms remain unclear.
+· We integrated high-resolution spatial transcriptomics and single-cell RNA sequencing to map the intricate interactions between immune cells, stroma, and hair follicles during CHS-induced hair growth in mice.
+· Among all immunocytes, macrophages underwent the most prominent compositional and functional remodeling.
+· We resolved five transcriptionally distinct macrophage subsets, with contact hypersensitivity driving a shift from homeostatic antigen-presenting cells toward a pro-inflammatory CD14+SPP1+ population.
+· Trajectory analysis revealed divergent differentiation paths under homeostatic versus allergic conditions, highlighting the plasticity of skin macrophages.
+· Mechanistically, CD14+SPP1+ macrophages secreted SPP1 (osteopontin), which engaged CD44 on hair follicle stem cells to activate PI3K-AKT signaling and trigger their proliferation.
+· Notably, canonical pro-inflammatory cytokine signaling through TNF-α and IL-1 was dispensable for this process, underscoring the specificity of the SPP1-CD44 axis in immune-mediated hair regeneration.
+· These findings reveal a macrophage-dependent mechanism of immune-mediated hair regeneration, offering therapeutic insights into immune-stem cell crosstalk.</a:t>
+            </a:r>
+          </a:p>
+        </p:txBody>
+      </p:sp>
+    </p:spTree>
+  </p:cSld>
+  <p:clrMapOvr>
+    <a:masterClrMapping/>
+  </p:clrMapOvr>
+</p:sld>
+</file>
+
+<file path=ppt/slides/slide8.xml><?xml version="1.0" encoding="utf-8"?>
+<p:sld xmlns:a="http://schemas.openxmlformats.org/drawingml/2006/main" xmlns:p="http://schemas.openxmlformats.org/presentationml/2006/main" xmlns:r="http://schemas.openxmlformats.org/officeDocument/2006/relationships">
+  <p:cSld>
+    <p:bg>
+      <p:bgPr>
+        <a:solidFill>
+          <a:srgbClr val="12142A"/>
+        </a:solidFill>
+        <a:effectLst/>
+      </p:bgPr>
+    </p:bg>
+    <p:spTree>
+      <p:nvGrpSpPr>
+        <p:cNvPr id="1" name=""/>
+        <p:cNvGrpSpPr/>
+        <p:nvPr/>
+      </p:nvGrpSpPr>
+      <p:grpSpPr/>
+      <p:sp>
+        <p:nvSpPr>
+          <p:cNvPr id="2" name="TextBox 1"/>
+          <p:cNvSpPr txBox="1"/>
+          <p:nvPr/>
+        </p:nvSpPr>
+        <p:spPr>
+          <a:xfrm>
             <a:off x="365760" y="731520"/>
             <a:ext cx="4828032" cy="548640"/>
           </a:xfrm>
@@ -4732,9 +4946,9 @@
                 <a:latin typeface="Arial"/>
               </a:rPr>
               <a:t>[출처]
-논문: Dose optimization of deuruxolitinib in adults with alopecia areata: A phase 2 randomized trial
-게재: Journal of the American Academy of Dermatology
-원문: https://pubmed.ncbi.nlm.nih.gov/42727780/
+논문: Contact hypersensitivity promotes hair regeneration through SPP1-secreting macrophages
+게재: The Journal of investigative dermatology
+원문: https://pubmed.ncbi.nlm.nih.gov/42727722/
 [이미지 출처]
 - Male pattern baldness.jpg / Originally uploaded by Lkinkade (Transferred by XenonX3) / CC BY-SA 2.5
   https://commons.wikimedia.org/wiki/File:Male_pattern_baldness.jpg

--- a/data/2026-09-13/slides.pptx
+++ b/data/2026-09-13/slides.pptx
@@ -13,6 +13,7 @@
     <p:sldId id="261" r:id="rId13"/>
     <p:sldId id="262" r:id="rId14"/>
     <p:sldId id="263" r:id="rId15"/>
+    <p:sldId id="264" r:id="rId16"/>
   </p:sldIdLst>
   <p:sldSz cx="5559552" cy="9875520" type="screen4x3"/>
   <p:notesSz cx="6858000" cy="9144000"/>
@@ -514,7 +515,7 @@
           </a:p>
           <a:p>
             <a:r>
-              <a:t>대본: 모발 재생 오늘 나온 최신 연구를 정리했습니다</a:t>
+              <a:t>대본: 오늘의 논문 Plant physiology and biochemistry에 실린 새 연구입니다</a:t>
             </a:r>
           </a:p>
           <a:p>
@@ -594,7 +595,7 @@
           </a:p>
           <a:p>
             <a:r>
-              <a:t>대본: 《The Journal of investigative dermatology》 - Contact hypersensitivity promotes hair regeneration through SPP1-secreting macrophages</a:t>
+              <a:t>대본: 《Plant physiology and biochemistry : PPB》 - Enhanced drought tolerance in Arabidopsis thaliana is mediated by Pseudomonas sp. M25 linked to root hair growth</a:t>
             </a:r>
           </a:p>
           <a:p>
@@ -674,7 +675,7 @@
           </a:p>
           <a:p>
             <a:r>
-              <a:t>대본: Allergic contact dermatitis, or contact hypersensitivity (CHS), is a pathological adaptive immune response that paradoxically induces hair regeneration, yet its underlying mechanisms remain unclear.</a:t>
+              <a:t>대본: Plants establish intimate associations with rhizosphere microorganisms that profoundly influence their growth, development, and stress resilience.</a:t>
             </a:r>
           </a:p>
           <a:p>
@@ -754,7 +755,7 @@
           </a:p>
           <a:p>
             <a:r>
-              <a:t>대본: We integrated high-resolution spatial transcriptomics and single-cell RNA sequencing to map the intricate interactions between immune cells, stroma, and hair follicles during CHS-induced hair growth in mice.</a:t>
+              <a:t>대본: Among these, plant-growth-promoting rhizobacteria (PGPR) enhance nutrient acquisition, modulate phytohormone homeostasis and reshape root system architecture, thereby improving plant fitness.</a:t>
             </a:r>
           </a:p>
           <a:p>
@@ -945,6 +946,81 @@
 </file>
 
 <file path=ppt/notesSlides/notesSlide7.xml><?xml version="1.0" encoding="utf-8"?>
+<p:notes xmlns:a="http://schemas.openxmlformats.org/drawingml/2006/main" xmlns:p="http://schemas.openxmlformats.org/presentationml/2006/main" xmlns:r="http://schemas.openxmlformats.org/officeDocument/2006/relationships">
+  <p:cSld>
+    <p:spTree>
+      <p:nvGrpSpPr>
+        <p:cNvPr id="1" name=""/>
+        <p:cNvGrpSpPr/>
+        <p:nvPr/>
+      </p:nvGrpSpPr>
+      <p:grpSpPr>
+        <a:xfrm>
+          <a:off x="0" y="0"/>
+          <a:ext cx="0" cy="0"/>
+          <a:chOff x="0" y="0"/>
+          <a:chExt cx="0" cy="0"/>
+        </a:xfrm>
+      </p:grpSpPr>
+      <p:sp>
+        <p:nvSpPr>
+          <p:cNvPr id="2" name="Slide Image Placeholder 1"/>
+          <p:cNvSpPr>
+            <a:spLocks noGrp="1"/>
+          </p:cNvSpPr>
+          <p:nvPr>
+            <p:ph type="sldImg" idx="2"/>
+          </p:nvPr>
+        </p:nvSpPr>
+        <p:spPr/>
+      </p:sp>
+      <p:sp>
+        <p:nvSpPr>
+          <p:cNvPr id="3" name="Notes Placeholder 2"/>
+          <p:cNvSpPr>
+            <a:spLocks noGrp="1"/>
+          </p:cNvSpPr>
+          <p:nvPr>
+            <p:ph type="body" idx="3" sz="quarter"/>
+          </p:nvPr>
+        </p:nvSpPr>
+        <p:spPr/>
+        <p:txBody>
+          <a:bodyPr/>
+          <a:lstStyle/>
+          <a:p>
+            <a:r>
+              <a:t>편집 참고용 슬라이드입니다. 영상에는 쓰지 않아도 됩니다.</a:t>
+            </a:r>
+          </a:p>
+          <a:p>
+            <a:r>
+              <a:t>원문 영어 문장을 그대로 발췌했으므로 번역·검수 후 사용하세요.</a:t>
+            </a:r>
+          </a:p>
+        </p:txBody>
+      </p:sp>
+      <p:sp>
+        <p:nvSpPr>
+          <p:cNvPr id="4" name="Slide Number Placeholder 3"/>
+          <p:cNvSpPr>
+            <a:spLocks noGrp="1"/>
+          </p:cNvSpPr>
+          <p:nvPr>
+            <p:ph type="sldNum" idx="5" sz="quarter"/>
+          </p:nvPr>
+        </p:nvSpPr>
+        <p:spPr/>
+      </p:sp>
+    </p:spTree>
+  </p:cSld>
+  <p:clrMapOvr>
+    <a:masterClrMapping/>
+  </p:clrMapOvr>
+</p:notes>
+</file>
+
+<file path=ppt/notesSlides/notesSlide8.xml><?xml version="1.0" encoding="utf-8"?>
 <p:notes xmlns:a="http://schemas.openxmlformats.org/drawingml/2006/main" xmlns:p="http://schemas.openxmlformats.org/presentationml/2006/main" xmlns:r="http://schemas.openxmlformats.org/officeDocument/2006/relationships">
   <p:cSld>
     <p:spTree>
@@ -4038,7 +4114,7 @@
                 </a:solidFill>
                 <a:latin typeface="Arial"/>
               </a:rPr>
-              <a:t>THE JOURNAL OF INVESTIGATIVE DERMATOLOGY</a:t>
+              <a:t>PLANT PHYSIOLOGY AND BIOCHEMISTRY : PPB</a:t>
             </a:r>
           </a:p>
         </p:txBody>
@@ -4073,7 +4149,7 @@
                 </a:solidFill>
                 <a:latin typeface="Arial"/>
               </a:rPr>
-              <a:t>모발 재생</a:t>
+              <a:t>오늘의 논문</a:t>
             </a:r>
           </a:p>
         </p:txBody>
@@ -4108,7 +4184,7 @@
                 </a:solidFill>
                 <a:latin typeface="Arial"/>
               </a:rPr>
-              <a:t>오늘 나온 최신 연구를 정리했습니다</a:t>
+              <a:t>Plant physiology and biochemistry에 실린 새 연구입니다</a:t>
             </a:r>
           </a:p>
         </p:txBody>
@@ -4143,7 +4219,7 @@
                 </a:solidFill>
                 <a:latin typeface="Arial"/>
               </a:rPr>
-              <a:t>2026 Sep 11  |  매일 아침 탈모 연구 한 편</a:t>
+              <a:t>2026 Sep 7  |  매일 아침 탈모 연구 한 편</a:t>
             </a:r>
           </a:p>
         </p:txBody>
@@ -4228,7 +4304,7 @@
                 </a:solidFill>
                 <a:latin typeface="Arial"/>
               </a:rPr>
-              <a:t>Contact hypersensitivity promotes hair regeneration through SPP1-secreting macrophages</a:t>
+              <a:t>Enhanced drought tolerance in Arabidopsis thaliana is mediated by Pseudomonas sp. M25 linked to root hair growth</a:t>
             </a:r>
           </a:p>
         </p:txBody>
@@ -4263,7 +4339,7 @@
                 </a:solidFill>
                 <a:latin typeface="Arial"/>
               </a:rPr>
-              <a:t>The Journal of investigative dermatology  ·  2026 Sep 11</a:t>
+              <a:t>Plant physiology and biochemistry : PPB  ·  2026 Sep 7</a:t>
             </a:r>
           </a:p>
         </p:txBody>
@@ -4392,7 +4468,7 @@
                 </a:solidFill>
                 <a:latin typeface="Arial"/>
               </a:rPr>
-              <a:t>Allergic contact dermatitis, or contact hypersensitivity (CHS), is a pathological adaptive immune response that paradoxically induces hair regeneration, yet its underlying mechanisms remain unclear.</a:t>
+              <a:t>Plants establish intimate associations with rhizosphere microorganisms that profoundly influence their growth, development, and stress resilience.</a:t>
             </a:r>
           </a:p>
         </p:txBody>
@@ -4521,7 +4597,7 @@
                 </a:solidFill>
                 <a:latin typeface="Arial"/>
               </a:rPr>
-              <a:t>We integrated high-resolution spatial transcriptomics and single-cell RNA sequencing to map the intricate interactions between immune cells, stroma, and hair follicles during CHS-induced hair growth in mice.</a:t>
+              <a:t>Among these, plant-growth-promoting rhizobacteria (PGPR) enhance nutrient acquisition, modulate phytohormone homeostasis and reshape root system architecture, thereby improving plant fitness.</a:t>
             </a:r>
           </a:p>
         </p:txBody>
@@ -4807,7 +4883,7 @@
                 </a:solidFill>
                 <a:latin typeface="Arial"/>
               </a:rPr>
-              <a:t>◆ 초록 요약 — Abstract</a:t>
+              <a:t>◆ 배경 — Background (자동 구분)</a:t>
             </a:r>
           </a:p>
         </p:txBody>
@@ -4842,14 +4918,83 @@
                 </a:solidFill>
                 <a:latin typeface="Arial"/>
               </a:rPr>
-              <a:t>· Allergic contact dermatitis, or contact hypersensitivity (CHS), is a pathological adaptive immune response that paradoxically induces hair regeneration, yet its underlying mechanisms remain unclear.
-· We integrated high-resolution spatial transcriptomics and single-cell RNA sequencing to map the intricate interactions between immune cells, stroma, and hair follicles during CHS-induced hair growth in mice.
-· Among all immunocytes, macrophages underwent the most prominent compositional and functional remodeling.
-· We resolved five transcriptionally distinct macrophage subsets, with contact hypersensitivity driving a shift from homeostatic antigen-presenting cells toward a pro-inflammatory CD14+SPP1+ population.
-· Trajectory analysis revealed divergent differentiation paths under homeostatic versus allergic conditions, highlighting the plasticity of skin macrophages.
-· Mechanistically, CD14+SPP1+ macrophages secreted SPP1 (osteopontin), which engaged CD44 on hair follicle stem cells to activate PI3K-AKT signaling and trigger their proliferation.
-· Notably, canonical pro-inflammatory cytokine signaling through TNF-α and IL-1 was dispensable for this process, underscoring the specificity of the SPP1-CD44 axis in immune-mediated hair regeneration.
-· These findings reveal a macrophage-dependent mechanism of immune-mediated hair regeneration, offering therapeutic insights into immune-stem cell crosstalk.</a:t>
+              <a:t>· Plants establish intimate associations with rhizosphere microorganisms that profoundly influence their growth, development, and stress resilience.
+· Among these, plant-growth-promoting rhizobacteria (PGPR) enhance nutrient acquisition, modulate phytohormone homeostasis and reshape root system architecture, thereby improving plant fitness.
+· Despite extensive evidence supporting their beneficial effects, the molecular and cellular mechanisms underlying microbe-driven modulation of specific root traits remain incompletely understood.</a:t>
+            </a:r>
+          </a:p>
+        </p:txBody>
+      </p:sp>
+      <p:sp>
+        <p:nvSpPr>
+          <p:cNvPr id="5" name="TextBox 4"/>
+          <p:cNvSpPr txBox="1"/>
+          <p:nvPr/>
+        </p:nvSpPr>
+        <p:spPr>
+          <a:xfrm>
+            <a:off x="365760" y="5303520"/>
+            <a:ext cx="4828032" cy="457200"/>
+          </a:xfrm>
+          <a:prstGeom prst="rect">
+            <a:avLst/>
+          </a:prstGeom>
+          <a:noFill/>
+        </p:spPr>
+        <p:txBody>
+          <a:bodyPr wrap="square" anchor="t">
+            <a:spAutoFit/>
+          </a:bodyPr>
+          <a:lstStyle/>
+          <a:p>
+            <a:pPr algn="l"/>
+            <a:r>
+              <a:rPr sz="1300" b="1">
+                <a:solidFill>
+                  <a:srgbClr val="FFFFFF"/>
+                </a:solidFill>
+                <a:latin typeface="Arial"/>
+              </a:rPr>
+              <a:t>◆ 주요 결과 — Results (자동 구분)</a:t>
+            </a:r>
+          </a:p>
+        </p:txBody>
+      </p:sp>
+      <p:sp>
+        <p:nvSpPr>
+          <p:cNvPr id="6" name="TextBox 5"/>
+          <p:cNvSpPr txBox="1"/>
+          <p:nvPr/>
+        </p:nvSpPr>
+        <p:spPr>
+          <a:xfrm>
+            <a:off x="457200" y="5806440"/>
+            <a:ext cx="4736592" cy="3566160"/>
+          </a:xfrm>
+          <a:prstGeom prst="rect">
+            <a:avLst/>
+          </a:prstGeom>
+          <a:noFill/>
+        </p:spPr>
+        <p:txBody>
+          <a:bodyPr wrap="square" anchor="t">
+            <a:spAutoFit/>
+          </a:bodyPr>
+          <a:lstStyle/>
+          <a:p>
+            <a:pPr algn="l"/>
+            <a:r>
+              <a:rPr sz="1000" b="0">
+                <a:solidFill>
+                  <a:srgbClr val="D5D8EA"/>
+                </a:solidFill>
+                <a:latin typeface="Arial"/>
+              </a:rPr>
+              <a:t>· Through extensive phenotypic investigation, we established that Pseudomonas sp.
+· M25, a previously described PGPR strain, produces a significant increase in leaf relative water content and evapotranspiration of Arabidopsis thaliana without impacting on rosette growth or photosynthetic parameters.
+· Inoculation with M25 leads to enhanced drought tolerance, and this is associated not with changes in root architecture but with a marked increase in root hair (RH) abundance and length.
+· The stimulation of RH development by this Pseudomonas strain is based on the genetic requirement for RH-related basic helix-loop-helix family transcription factors, including ROOT HAIR DEFECTIVE 6 (RHD6) and RHD6-LIKE 1 (RSL1), which regulate RH development via RHD6-LIKE 4 (RSL4) and RHD6-LIKE 2 (RSL2).
+· M25 can partially circumvent the lack of RHD6 but requires RSL1 and the downstream transcription factors RSL2 and RSL4 to induce RH growth.</a:t>
             </a:r>
           </a:p>
         </p:txBody>
@@ -4888,6 +5033,137 @@
         </p:nvSpPr>
         <p:spPr>
           <a:xfrm>
+            <a:off x="365760" y="457200"/>
+            <a:ext cx="4828032" cy="457200"/>
+          </a:xfrm>
+          <a:prstGeom prst="rect">
+            <a:avLst/>
+          </a:prstGeom>
+          <a:noFill/>
+        </p:spPr>
+        <p:txBody>
+          <a:bodyPr wrap="square" anchor="ctr">
+            <a:spAutoFit/>
+          </a:bodyPr>
+          <a:lstStyle/>
+          <a:p>
+            <a:pPr algn="l"/>
+            <a:r>
+              <a:rPr sz="1600" b="1">
+                <a:solidFill>
+                  <a:srgbClr val="FF6B6B"/>
+                </a:solidFill>
+                <a:latin typeface="Arial"/>
+              </a:rPr>
+              <a:t>본문 요약 (편집용)</a:t>
+            </a:r>
+          </a:p>
+        </p:txBody>
+      </p:sp>
+      <p:sp>
+        <p:nvSpPr>
+          <p:cNvPr id="3" name="TextBox 2"/>
+          <p:cNvSpPr txBox="1"/>
+          <p:nvPr/>
+        </p:nvSpPr>
+        <p:spPr>
+          <a:xfrm>
+            <a:off x="365760" y="1097280"/>
+            <a:ext cx="4828032" cy="457200"/>
+          </a:xfrm>
+          <a:prstGeom prst="rect">
+            <a:avLst/>
+          </a:prstGeom>
+          <a:noFill/>
+        </p:spPr>
+        <p:txBody>
+          <a:bodyPr wrap="square" anchor="t">
+            <a:spAutoFit/>
+          </a:bodyPr>
+          <a:lstStyle/>
+          <a:p>
+            <a:pPr algn="l"/>
+            <a:r>
+              <a:rPr sz="1300" b="1">
+                <a:solidFill>
+                  <a:srgbClr val="FFFFFF"/>
+                </a:solidFill>
+                <a:latin typeface="Arial"/>
+              </a:rPr>
+              <a:t>◆ 결론 — Conclusion (자동 구분)</a:t>
+            </a:r>
+          </a:p>
+        </p:txBody>
+      </p:sp>
+      <p:sp>
+        <p:nvSpPr>
+          <p:cNvPr id="4" name="TextBox 3"/>
+          <p:cNvSpPr txBox="1"/>
+          <p:nvPr/>
+        </p:nvSpPr>
+        <p:spPr>
+          <a:xfrm>
+            <a:off x="457200" y="1600200"/>
+            <a:ext cx="4736592" cy="3566160"/>
+          </a:xfrm>
+          <a:prstGeom prst="rect">
+            <a:avLst/>
+          </a:prstGeom>
+          <a:noFill/>
+        </p:spPr>
+        <p:txBody>
+          <a:bodyPr wrap="square" anchor="t">
+            <a:spAutoFit/>
+          </a:bodyPr>
+          <a:lstStyle/>
+          <a:p>
+            <a:pPr algn="l"/>
+            <a:r>
+              <a:rPr sz="1000" b="0">
+                <a:solidFill>
+                  <a:srgbClr val="D5D8EA"/>
+                </a:solidFill>
+                <a:latin typeface="Arial"/>
+              </a:rPr>
+              <a:t>· These findings indicate that this bacterium can circumvent RHD6 to activate RSL4, which subsequently promotes RH growth.</a:t>
+            </a:r>
+          </a:p>
+        </p:txBody>
+      </p:sp>
+    </p:spTree>
+  </p:cSld>
+  <p:clrMapOvr>
+    <a:masterClrMapping/>
+  </p:clrMapOvr>
+</p:sld>
+</file>
+
+<file path=ppt/slides/slide9.xml><?xml version="1.0" encoding="utf-8"?>
+<p:sld xmlns:a="http://schemas.openxmlformats.org/drawingml/2006/main" xmlns:p="http://schemas.openxmlformats.org/presentationml/2006/main" xmlns:r="http://schemas.openxmlformats.org/officeDocument/2006/relationships">
+  <p:cSld>
+    <p:bg>
+      <p:bgPr>
+        <a:solidFill>
+          <a:srgbClr val="12142A"/>
+        </a:solidFill>
+        <a:effectLst/>
+      </p:bgPr>
+    </p:bg>
+    <p:spTree>
+      <p:nvGrpSpPr>
+        <p:cNvPr id="1" name=""/>
+        <p:cNvGrpSpPr/>
+        <p:nvPr/>
+      </p:nvGrpSpPr>
+      <p:grpSpPr/>
+      <p:sp>
+        <p:nvSpPr>
+          <p:cNvPr id="2" name="TextBox 1"/>
+          <p:cNvSpPr txBox="1"/>
+          <p:nvPr/>
+        </p:nvSpPr>
+        <p:spPr>
+          <a:xfrm>
             <a:off x="365760" y="731520"/>
             <a:ext cx="4828032" cy="548640"/>
           </a:xfrm>
@@ -4946,9 +5222,9 @@
                 <a:latin typeface="Arial"/>
               </a:rPr>
               <a:t>[출처]
-논문: Contact hypersensitivity promotes hair regeneration through SPP1-secreting macrophages
-게재: The Journal of investigative dermatology
-원문: https://pubmed.ncbi.nlm.nih.gov/42727722/
+논문: Enhanced drought tolerance in Arabidopsis thaliana is mediated by Pseudomonas sp. M25 linked to root hair growth
+게재: Plant physiology and biochemistry : PPB
+원문: https://pubmed.ncbi.nlm.nih.gov/42727487/
 [이미지 출처]
 - Male pattern baldness.jpg / Originally uploaded by Lkinkade (Transferred by XenonX3) / CC BY-SA 2.5
   https://commons.wikimedia.org/wiki/File:Male_pattern_baldness.jpg

--- a/data/2026-09-13/slides.pptx
+++ b/data/2026-09-13/slides.pptx
@@ -11,9 +11,6 @@
     <p:sldId id="259" r:id="rId11"/>
     <p:sldId id="260" r:id="rId12"/>
     <p:sldId id="261" r:id="rId13"/>
-    <p:sldId id="262" r:id="rId14"/>
-    <p:sldId id="263" r:id="rId15"/>
-    <p:sldId id="264" r:id="rId16"/>
   </p:sldIdLst>
   <p:sldSz cx="5559552" cy="9875520" type="screen4x3"/>
   <p:notesSz cx="6858000" cy="9144000"/>
@@ -515,7 +512,7 @@
           </a:p>
           <a:p>
             <a:r>
-              <a:t>대본: 오늘의 논문 Plant physiology and biochemistry에 실린 새 연구입니다</a:t>
+              <a:t>대본: 탈모 뉴스 오늘 나온 소식을 3줄로 정리했습니다</a:t>
             </a:r>
           </a:p>
           <a:p>
@@ -595,7 +592,7 @@
           </a:p>
           <a:p>
             <a:r>
-              <a:t>대본: 《Plant physiology and biochemistry : PPB》 - Enhanced drought tolerance in Arabidopsis thaliana is mediated by Pseudomonas sp. M25 linked to root hair growth</a:t>
+              <a:t>대본: [에이피알] 에이피알, 고주파 미세천공 기술 기반 탈모 치료 효능 연구 국제 학술지 게재 - 에이피알 공식 블로그</a:t>
             </a:r>
           </a:p>
           <a:p>
@@ -675,7 +672,7 @@
           </a:p>
           <a:p>
             <a:r>
-              <a:t>대본: Plants establish intimate associations with rhizosphere microorganisms that profoundly influence their growth, development, and stress resilience.</a:t>
+              <a:t>대본: [에이피알] 에이피알, 고주파 미세천공 기술 기반 탈모 치료 효능 연구 국제 학술지 게재&amp;nbsp;&amp;nbsp;에이피알 공식 블로그</a:t>
             </a:r>
           </a:p>
           <a:p>
@@ -750,17 +747,17 @@
           <a:lstStyle/>
           <a:p>
             <a:r>
-              <a:t>[key_finding_2] 약 10초</a:t>
-            </a:r>
-          </a:p>
-          <a:p>
-            <a:r>
-              <a:t>대본: Among these, plant-growth-promoting rhizobacteria (PGPR) enhance nutrient acquisition, modulate phytohormone homeostasis and reshape root system architecture, thereby improving plant fitness.</a:t>
-            </a:r>
-          </a:p>
-          <a:p>
-            <a:r>
-              <a:t>연출 노트: 핵심 포인트 2.</a:t>
+              <a:t>[my_take] 약 10초</a:t>
+            </a:r>
+          </a:p>
+          <a:p>
+            <a:r>
+              <a:t>대본: 탈모 연구, 매일 쉽게 정리해드립니다 🙂</a:t>
+            </a:r>
+          </a:p>
+          <a:p>
+            <a:r>
+              <a:t>연출 노트: 본인 사진 + 코멘트. 문구를 직접 바꿔 쓰세요.</a:t>
             </a:r>
           </a:p>
         </p:txBody>
@@ -830,247 +827,17 @@
           <a:lstStyle/>
           <a:p>
             <a:r>
-              <a:t>[my_take] 약 10초</a:t>
-            </a:r>
-          </a:p>
-          <a:p>
-            <a:r>
-              <a:t>대본: 탈모 연구, 매일 쉽게 정리해드립니다 🙂</a:t>
-            </a:r>
-          </a:p>
-          <a:p>
-            <a:r>
-              <a:t>연출 노트: 본인 사진 + 코멘트. 문구를 직접 바꿔 쓰세요.</a:t>
-            </a:r>
-          </a:p>
-        </p:txBody>
-      </p:sp>
-      <p:sp>
-        <p:nvSpPr>
-          <p:cNvPr id="4" name="Slide Number Placeholder 3"/>
-          <p:cNvSpPr>
-            <a:spLocks noGrp="1"/>
-          </p:cNvSpPr>
-          <p:nvPr>
-            <p:ph type="sldNum" idx="5" sz="quarter"/>
-          </p:nvPr>
-        </p:nvSpPr>
-        <p:spPr/>
-      </p:sp>
-    </p:spTree>
-  </p:cSld>
-  <p:clrMapOvr>
-    <a:masterClrMapping/>
-  </p:clrMapOvr>
-</p:notes>
-</file>
-
-<file path=ppt/notesSlides/notesSlide6.xml><?xml version="1.0" encoding="utf-8"?>
-<p:notes xmlns:a="http://schemas.openxmlformats.org/drawingml/2006/main" xmlns:p="http://schemas.openxmlformats.org/presentationml/2006/main" xmlns:r="http://schemas.openxmlformats.org/officeDocument/2006/relationships">
-  <p:cSld>
-    <p:spTree>
-      <p:nvGrpSpPr>
-        <p:cNvPr id="1" name=""/>
-        <p:cNvGrpSpPr/>
-        <p:nvPr/>
-      </p:nvGrpSpPr>
-      <p:grpSpPr>
-        <a:xfrm>
-          <a:off x="0" y="0"/>
-          <a:ext cx="0" cy="0"/>
-          <a:chOff x="0" y="0"/>
-          <a:chExt cx="0" cy="0"/>
-        </a:xfrm>
-      </p:grpSpPr>
-      <p:sp>
-        <p:nvSpPr>
-          <p:cNvPr id="2" name="Slide Image Placeholder 1"/>
-          <p:cNvSpPr>
-            <a:spLocks noGrp="1"/>
-          </p:cNvSpPr>
-          <p:nvPr>
-            <p:ph type="sldImg" idx="2"/>
-          </p:nvPr>
-        </p:nvSpPr>
-        <p:spPr/>
-      </p:sp>
-      <p:sp>
-        <p:nvSpPr>
-          <p:cNvPr id="3" name="Notes Placeholder 2"/>
-          <p:cNvSpPr>
-            <a:spLocks noGrp="1"/>
-          </p:cNvSpPr>
-          <p:nvPr>
-            <p:ph type="body" idx="3" sz="quarter"/>
-          </p:nvPr>
-        </p:nvSpPr>
-        <p:spPr/>
-        <p:txBody>
-          <a:bodyPr/>
-          <a:lstStyle/>
-          <a:p>
-            <a:r>
               <a:t>[cta] 약 8초</a:t>
             </a:r>
           </a:p>
           <a:p>
             <a:r>
-              <a:t>대본: 더 자세한 내용은 원문 링크에서 확인하세요. 매일 새로운 탈모 연구, 팔로우하고 놓치지 마세요!</a:t>
+              <a:t>대본: 원문은 링크에서 확인하세요. 매일 새로운 탈모 소식, 놓치지 마세요!</a:t>
             </a:r>
           </a:p>
           <a:p>
             <a:r>
               <a:t>연출 노트: 원문 링크는 고정 댓글로 안내.</a:t>
-            </a:r>
-          </a:p>
-        </p:txBody>
-      </p:sp>
-      <p:sp>
-        <p:nvSpPr>
-          <p:cNvPr id="4" name="Slide Number Placeholder 3"/>
-          <p:cNvSpPr>
-            <a:spLocks noGrp="1"/>
-          </p:cNvSpPr>
-          <p:nvPr>
-            <p:ph type="sldNum" idx="5" sz="quarter"/>
-          </p:nvPr>
-        </p:nvSpPr>
-        <p:spPr/>
-      </p:sp>
-    </p:spTree>
-  </p:cSld>
-  <p:clrMapOvr>
-    <a:masterClrMapping/>
-  </p:clrMapOvr>
-</p:notes>
-</file>
-
-<file path=ppt/notesSlides/notesSlide7.xml><?xml version="1.0" encoding="utf-8"?>
-<p:notes xmlns:a="http://schemas.openxmlformats.org/drawingml/2006/main" xmlns:p="http://schemas.openxmlformats.org/presentationml/2006/main" xmlns:r="http://schemas.openxmlformats.org/officeDocument/2006/relationships">
-  <p:cSld>
-    <p:spTree>
-      <p:nvGrpSpPr>
-        <p:cNvPr id="1" name=""/>
-        <p:cNvGrpSpPr/>
-        <p:nvPr/>
-      </p:nvGrpSpPr>
-      <p:grpSpPr>
-        <a:xfrm>
-          <a:off x="0" y="0"/>
-          <a:ext cx="0" cy="0"/>
-          <a:chOff x="0" y="0"/>
-          <a:chExt cx="0" cy="0"/>
-        </a:xfrm>
-      </p:grpSpPr>
-      <p:sp>
-        <p:nvSpPr>
-          <p:cNvPr id="2" name="Slide Image Placeholder 1"/>
-          <p:cNvSpPr>
-            <a:spLocks noGrp="1"/>
-          </p:cNvSpPr>
-          <p:nvPr>
-            <p:ph type="sldImg" idx="2"/>
-          </p:nvPr>
-        </p:nvSpPr>
-        <p:spPr/>
-      </p:sp>
-      <p:sp>
-        <p:nvSpPr>
-          <p:cNvPr id="3" name="Notes Placeholder 2"/>
-          <p:cNvSpPr>
-            <a:spLocks noGrp="1"/>
-          </p:cNvSpPr>
-          <p:nvPr>
-            <p:ph type="body" idx="3" sz="quarter"/>
-          </p:nvPr>
-        </p:nvSpPr>
-        <p:spPr/>
-        <p:txBody>
-          <a:bodyPr/>
-          <a:lstStyle/>
-          <a:p>
-            <a:r>
-              <a:t>편집 참고용 슬라이드입니다. 영상에는 쓰지 않아도 됩니다.</a:t>
-            </a:r>
-          </a:p>
-          <a:p>
-            <a:r>
-              <a:t>원문 영어 문장을 그대로 발췌했으므로 번역·검수 후 사용하세요.</a:t>
-            </a:r>
-          </a:p>
-        </p:txBody>
-      </p:sp>
-      <p:sp>
-        <p:nvSpPr>
-          <p:cNvPr id="4" name="Slide Number Placeholder 3"/>
-          <p:cNvSpPr>
-            <a:spLocks noGrp="1"/>
-          </p:cNvSpPr>
-          <p:nvPr>
-            <p:ph type="sldNum" idx="5" sz="quarter"/>
-          </p:nvPr>
-        </p:nvSpPr>
-        <p:spPr/>
-      </p:sp>
-    </p:spTree>
-  </p:cSld>
-  <p:clrMapOvr>
-    <a:masterClrMapping/>
-  </p:clrMapOvr>
-</p:notes>
-</file>
-
-<file path=ppt/notesSlides/notesSlide8.xml><?xml version="1.0" encoding="utf-8"?>
-<p:notes xmlns:a="http://schemas.openxmlformats.org/drawingml/2006/main" xmlns:p="http://schemas.openxmlformats.org/presentationml/2006/main" xmlns:r="http://schemas.openxmlformats.org/officeDocument/2006/relationships">
-  <p:cSld>
-    <p:spTree>
-      <p:nvGrpSpPr>
-        <p:cNvPr id="1" name=""/>
-        <p:cNvGrpSpPr/>
-        <p:nvPr/>
-      </p:nvGrpSpPr>
-      <p:grpSpPr>
-        <a:xfrm>
-          <a:off x="0" y="0"/>
-          <a:ext cx="0" cy="0"/>
-          <a:chOff x="0" y="0"/>
-          <a:chExt cx="0" cy="0"/>
-        </a:xfrm>
-      </p:grpSpPr>
-      <p:sp>
-        <p:nvSpPr>
-          <p:cNvPr id="2" name="Slide Image Placeholder 1"/>
-          <p:cNvSpPr>
-            <a:spLocks noGrp="1"/>
-          </p:cNvSpPr>
-          <p:nvPr>
-            <p:ph type="sldImg" idx="2"/>
-          </p:nvPr>
-        </p:nvSpPr>
-        <p:spPr/>
-      </p:sp>
-      <p:sp>
-        <p:nvSpPr>
-          <p:cNvPr id="3" name="Notes Placeholder 2"/>
-          <p:cNvSpPr>
-            <a:spLocks noGrp="1"/>
-          </p:cNvSpPr>
-          <p:nvPr>
-            <p:ph type="body" idx="3" sz="quarter"/>
-          </p:nvPr>
-        </p:nvSpPr>
-        <p:spPr/>
-        <p:txBody>
-          <a:bodyPr/>
-          <a:lstStyle/>
-          <a:p>
-            <a:r>
-              <a:t>편집 참고용 슬라이드입니다. 영상에는 쓰지 않아도 됩니다.</a:t>
-            </a:r>
-          </a:p>
-          <a:p>
-            <a:r>
-              <a:t>원문 영어 문장을 그대로 발췌했으므로 번역·검수 후 사용하세요.</a:t>
             </a:r>
           </a:p>
         </p:txBody>
@@ -4114,7 +3881,7 @@
                 </a:solidFill>
                 <a:latin typeface="Arial"/>
               </a:rPr>
-              <a:t>PLANT PHYSIOLOGY AND BIOCHEMISTRY : PPB</a:t>
+              <a:t>에이피알 공식 블로그</a:t>
             </a:r>
           </a:p>
         </p:txBody>
@@ -4149,7 +3916,7 @@
                 </a:solidFill>
                 <a:latin typeface="Arial"/>
               </a:rPr>
-              <a:t>오늘의 논문</a:t>
+              <a:t>탈모 뉴스</a:t>
             </a:r>
           </a:p>
         </p:txBody>
@@ -4184,7 +3951,7 @@
                 </a:solidFill>
                 <a:latin typeface="Arial"/>
               </a:rPr>
-              <a:t>Plant physiology and biochemistry에 실린 새 연구입니다</a:t>
+              <a:t>오늘 나온 소식을 3줄로 정리했습니다</a:t>
             </a:r>
           </a:p>
         </p:txBody>
@@ -4219,7 +3986,7 @@
                 </a:solidFill>
                 <a:latin typeface="Arial"/>
               </a:rPr>
-              <a:t>2026 Sep 7  |  매일 아침 탈모 연구 한 편</a:t>
+              <a:t>Sat, 12 Sep 2026 23:08:16 GMT  |  매일 아침 탈모 연구 한 편</a:t>
             </a:r>
           </a:p>
         </p:txBody>
@@ -4304,7 +4071,7 @@
                 </a:solidFill>
                 <a:latin typeface="Arial"/>
               </a:rPr>
-              <a:t>Enhanced drought tolerance in Arabidopsis thaliana is mediated by Pseudomonas sp. M25 linked to root hair growth</a:t>
+              <a:t>[에이피알] 에이피알, 고주파 미세천공 기술 기반 탈모 치료 효능 연구 국제 학술지 게재 - 에이피알 공식 블로그</a:t>
             </a:r>
           </a:p>
         </p:txBody>
@@ -4339,7 +4106,7 @@
                 </a:solidFill>
                 <a:latin typeface="Arial"/>
               </a:rPr>
-              <a:t>Plant physiology and biochemistry : PPB  ·  2026 Sep 7</a:t>
+              <a:t>  ·  Sat, 12 Sep 2026 23:08:16 GMT</a:t>
             </a:r>
           </a:p>
         </p:txBody>
@@ -4468,7 +4235,7 @@
                 </a:solidFill>
                 <a:latin typeface="Arial"/>
               </a:rPr>
-              <a:t>Plants establish intimate associations with rhizosphere microorganisms that profoundly influence their growth, development, and stress resilience.</a:t>
+              <a:t>[에이피알] 에이피알, 고주파 미세천공 기술 기반 탈모 치료 효능 연구 국제 학술지 게재&amp;nbsp;&amp;nbsp;에이피알 공식 블로그</a:t>
             </a:r>
           </a:p>
         </p:txBody>
@@ -4482,135 +4249,6 @@
 </file>
 
 <file path=ppt/slides/slide4.xml><?xml version="1.0" encoding="utf-8"?>
-<p:sld xmlns:a="http://schemas.openxmlformats.org/drawingml/2006/main" xmlns:p="http://schemas.openxmlformats.org/presentationml/2006/main" xmlns:r="http://schemas.openxmlformats.org/officeDocument/2006/relationships">
-  <p:cSld>
-    <p:bg>
-      <p:bgPr>
-        <a:solidFill>
-          <a:srgbClr val="1B1F3B"/>
-        </a:solidFill>
-        <a:effectLst/>
-      </p:bgPr>
-    </p:bg>
-    <p:spTree>
-      <p:nvGrpSpPr>
-        <p:cNvPr id="1" name=""/>
-        <p:cNvGrpSpPr/>
-        <p:nvPr/>
-      </p:nvGrpSpPr>
-      <p:grpSpPr/>
-      <p:pic>
-        <p:nvPicPr>
-          <p:cNvPr id="2" name="Picture 1" descr="topic_2.jpg"/>
-          <p:cNvPicPr>
-            <a:picLocks noChangeAspect="1"/>
-          </p:cNvPicPr>
-          <p:nvPr/>
-        </p:nvPicPr>
-        <p:blipFill>
-          <a:blip r:embed="rId2"/>
-          <a:stretch>
-            <a:fillRect/>
-          </a:stretch>
-        </p:blipFill>
-        <p:spPr>
-          <a:xfrm>
-            <a:off x="-923544" y="0"/>
-            <a:ext cx="7406640" cy="9875520"/>
-          </a:xfrm>
-          <a:prstGeom prst="rect">
-            <a:avLst/>
-          </a:prstGeom>
-        </p:spPr>
-      </p:pic>
-      <p:sp>
-        <p:nvSpPr>
-          <p:cNvPr id="3" name="Rectangle 2"/>
-          <p:cNvSpPr/>
-          <p:nvPr/>
-        </p:nvSpPr>
-        <p:spPr>
-          <a:xfrm>
-            <a:off x="0" y="6122822"/>
-            <a:ext cx="5559552" cy="3752698"/>
-          </a:xfrm>
-          <a:prstGeom prst="rect">
-            <a:avLst/>
-          </a:prstGeom>
-          <a:solidFill>
-            <a:srgbClr val="000000"/>
-          </a:solidFill>
-          <a:ln>
-            <a:noFill/>
-          </a:ln>
-          <a:effectLst/>
-        </p:spPr>
-        <p:style>
-          <a:lnRef idx="1">
-            <a:schemeClr val="accent1"/>
-          </a:lnRef>
-          <a:fillRef idx="3">
-            <a:schemeClr val="accent1"/>
-          </a:fillRef>
-          <a:effectRef idx="2">
-            <a:schemeClr val="accent1"/>
-          </a:effectRef>
-          <a:fontRef idx="minor">
-            <a:schemeClr val="lt1"/>
-          </a:fontRef>
-        </p:style>
-        <p:txBody>
-          <a:bodyPr rtlCol="0" anchor="ctr"/>
-          <a:lstStyle/>
-          <a:p>
-            <a:pPr algn="ctr"/>
-          </a:p>
-        </p:txBody>
-      </p:sp>
-      <p:sp>
-        <p:nvSpPr>
-          <p:cNvPr id="4" name="TextBox 3"/>
-          <p:cNvSpPr txBox="1"/>
-          <p:nvPr/>
-        </p:nvSpPr>
-        <p:spPr>
-          <a:xfrm>
-            <a:off x="365760" y="6400800"/>
-            <a:ext cx="4828032" cy="2926080"/>
-          </a:xfrm>
-          <a:prstGeom prst="rect">
-            <a:avLst/>
-          </a:prstGeom>
-          <a:noFill/>
-        </p:spPr>
-        <p:txBody>
-          <a:bodyPr wrap="square" anchor="ctr">
-            <a:spAutoFit/>
-          </a:bodyPr>
-          <a:lstStyle/>
-          <a:p>
-            <a:pPr algn="ctr"/>
-            <a:r>
-              <a:rPr sz="2200" b="1">
-                <a:solidFill>
-                  <a:srgbClr val="FFFFFF"/>
-                </a:solidFill>
-                <a:latin typeface="Arial"/>
-              </a:rPr>
-              <a:t>Among these, plant-growth-promoting rhizobacteria (PGPR) enhance nutrient acquisition, modulate phytohormone homeostasis and reshape root system architecture, thereby improving plant fitness.</a:t>
-            </a:r>
-          </a:p>
-        </p:txBody>
-      </p:sp>
-    </p:spTree>
-  </p:cSld>
-  <p:clrMapOvr>
-    <a:masterClrMapping/>
-  </p:clrMapOvr>
-</p:sld>
-</file>
-
-<file path=ppt/slides/slide5.xml><?xml version="1.0" encoding="utf-8"?>
 <p:sld xmlns:a="http://schemas.openxmlformats.org/drawingml/2006/main" xmlns:p="http://schemas.openxmlformats.org/presentationml/2006/main" xmlns:r="http://schemas.openxmlformats.org/officeDocument/2006/relationships">
   <p:cSld>
     <p:bg>
@@ -4739,7 +4377,7 @@
 </p:sld>
 </file>
 
-<file path=ppt/slides/slide6.xml><?xml version="1.0" encoding="utf-8"?>
+<file path=ppt/slides/slide5.xml><?xml version="1.0" encoding="utf-8"?>
 <p:sld xmlns:a="http://schemas.openxmlformats.org/drawingml/2006/main" xmlns:p="http://schemas.openxmlformats.org/presentationml/2006/main" xmlns:r="http://schemas.openxmlformats.org/officeDocument/2006/relationships">
   <p:cSld>
     <p:bg>
@@ -4787,7 +4425,7 @@
                 </a:solidFill>
                 <a:latin typeface="Arial"/>
               </a:rPr>
-              <a:t>더 자세한 내용은 원문 링크에서 확인하세요. 매일 새로운 탈모 연구, 팔로우하고 놓치지 마세요!</a:t>
+              <a:t>원문은 링크에서 확인하세요. 매일 새로운 탈모 소식, 놓치지 마세요!</a:t>
             </a:r>
           </a:p>
         </p:txBody>
@@ -4800,7 +4438,7 @@
 </p:sld>
 </file>
 
-<file path=ppt/slides/slide7.xml><?xml version="1.0" encoding="utf-8"?>
+<file path=ppt/slides/slide6.xml><?xml version="1.0" encoding="utf-8"?>
 <p:sld xmlns:a="http://schemas.openxmlformats.org/drawingml/2006/main" xmlns:p="http://schemas.openxmlformats.org/presentationml/2006/main" xmlns:r="http://schemas.openxmlformats.org/officeDocument/2006/relationships">
   <p:cSld>
     <p:bg>
@@ -4826,344 +4464,6 @@
         </p:nvSpPr>
         <p:spPr>
           <a:xfrm>
-            <a:off x="365760" y="457200"/>
-            <a:ext cx="4828032" cy="457200"/>
-          </a:xfrm>
-          <a:prstGeom prst="rect">
-            <a:avLst/>
-          </a:prstGeom>
-          <a:noFill/>
-        </p:spPr>
-        <p:txBody>
-          <a:bodyPr wrap="square" anchor="ctr">
-            <a:spAutoFit/>
-          </a:bodyPr>
-          <a:lstStyle/>
-          <a:p>
-            <a:pPr algn="l"/>
-            <a:r>
-              <a:rPr sz="1600" b="1">
-                <a:solidFill>
-                  <a:srgbClr val="FF6B6B"/>
-                </a:solidFill>
-                <a:latin typeface="Arial"/>
-              </a:rPr>
-              <a:t>본문 요약 (편집용)</a:t>
-            </a:r>
-          </a:p>
-        </p:txBody>
-      </p:sp>
-      <p:sp>
-        <p:nvSpPr>
-          <p:cNvPr id="3" name="TextBox 2"/>
-          <p:cNvSpPr txBox="1"/>
-          <p:nvPr/>
-        </p:nvSpPr>
-        <p:spPr>
-          <a:xfrm>
-            <a:off x="365760" y="1097280"/>
-            <a:ext cx="4828032" cy="457200"/>
-          </a:xfrm>
-          <a:prstGeom prst="rect">
-            <a:avLst/>
-          </a:prstGeom>
-          <a:noFill/>
-        </p:spPr>
-        <p:txBody>
-          <a:bodyPr wrap="square" anchor="t">
-            <a:spAutoFit/>
-          </a:bodyPr>
-          <a:lstStyle/>
-          <a:p>
-            <a:pPr algn="l"/>
-            <a:r>
-              <a:rPr sz="1300" b="1">
-                <a:solidFill>
-                  <a:srgbClr val="FFFFFF"/>
-                </a:solidFill>
-                <a:latin typeface="Arial"/>
-              </a:rPr>
-              <a:t>◆ 배경 — Background (자동 구분)</a:t>
-            </a:r>
-          </a:p>
-        </p:txBody>
-      </p:sp>
-      <p:sp>
-        <p:nvSpPr>
-          <p:cNvPr id="4" name="TextBox 3"/>
-          <p:cNvSpPr txBox="1"/>
-          <p:nvPr/>
-        </p:nvSpPr>
-        <p:spPr>
-          <a:xfrm>
-            <a:off x="457200" y="1600200"/>
-            <a:ext cx="4736592" cy="3566160"/>
-          </a:xfrm>
-          <a:prstGeom prst="rect">
-            <a:avLst/>
-          </a:prstGeom>
-          <a:noFill/>
-        </p:spPr>
-        <p:txBody>
-          <a:bodyPr wrap="square" anchor="t">
-            <a:spAutoFit/>
-          </a:bodyPr>
-          <a:lstStyle/>
-          <a:p>
-            <a:pPr algn="l"/>
-            <a:r>
-              <a:rPr sz="1000" b="0">
-                <a:solidFill>
-                  <a:srgbClr val="D5D8EA"/>
-                </a:solidFill>
-                <a:latin typeface="Arial"/>
-              </a:rPr>
-              <a:t>· Plants establish intimate associations with rhizosphere microorganisms that profoundly influence their growth, development, and stress resilience.
-· Among these, plant-growth-promoting rhizobacteria (PGPR) enhance nutrient acquisition, modulate phytohormone homeostasis and reshape root system architecture, thereby improving plant fitness.
-· Despite extensive evidence supporting their beneficial effects, the molecular and cellular mechanisms underlying microbe-driven modulation of specific root traits remain incompletely understood.</a:t>
-            </a:r>
-          </a:p>
-        </p:txBody>
-      </p:sp>
-      <p:sp>
-        <p:nvSpPr>
-          <p:cNvPr id="5" name="TextBox 4"/>
-          <p:cNvSpPr txBox="1"/>
-          <p:nvPr/>
-        </p:nvSpPr>
-        <p:spPr>
-          <a:xfrm>
-            <a:off x="365760" y="5303520"/>
-            <a:ext cx="4828032" cy="457200"/>
-          </a:xfrm>
-          <a:prstGeom prst="rect">
-            <a:avLst/>
-          </a:prstGeom>
-          <a:noFill/>
-        </p:spPr>
-        <p:txBody>
-          <a:bodyPr wrap="square" anchor="t">
-            <a:spAutoFit/>
-          </a:bodyPr>
-          <a:lstStyle/>
-          <a:p>
-            <a:pPr algn="l"/>
-            <a:r>
-              <a:rPr sz="1300" b="1">
-                <a:solidFill>
-                  <a:srgbClr val="FFFFFF"/>
-                </a:solidFill>
-                <a:latin typeface="Arial"/>
-              </a:rPr>
-              <a:t>◆ 주요 결과 — Results (자동 구분)</a:t>
-            </a:r>
-          </a:p>
-        </p:txBody>
-      </p:sp>
-      <p:sp>
-        <p:nvSpPr>
-          <p:cNvPr id="6" name="TextBox 5"/>
-          <p:cNvSpPr txBox="1"/>
-          <p:nvPr/>
-        </p:nvSpPr>
-        <p:spPr>
-          <a:xfrm>
-            <a:off x="457200" y="5806440"/>
-            <a:ext cx="4736592" cy="3566160"/>
-          </a:xfrm>
-          <a:prstGeom prst="rect">
-            <a:avLst/>
-          </a:prstGeom>
-          <a:noFill/>
-        </p:spPr>
-        <p:txBody>
-          <a:bodyPr wrap="square" anchor="t">
-            <a:spAutoFit/>
-          </a:bodyPr>
-          <a:lstStyle/>
-          <a:p>
-            <a:pPr algn="l"/>
-            <a:r>
-              <a:rPr sz="1000" b="0">
-                <a:solidFill>
-                  <a:srgbClr val="D5D8EA"/>
-                </a:solidFill>
-                <a:latin typeface="Arial"/>
-              </a:rPr>
-              <a:t>· Through extensive phenotypic investigation, we established that Pseudomonas sp.
-· M25, a previously described PGPR strain, produces a significant increase in leaf relative water content and evapotranspiration of Arabidopsis thaliana without impacting on rosette growth or photosynthetic parameters.
-· Inoculation with M25 leads to enhanced drought tolerance, and this is associated not with changes in root architecture but with a marked increase in root hair (RH) abundance and length.
-· The stimulation of RH development by this Pseudomonas strain is based on the genetic requirement for RH-related basic helix-loop-helix family transcription factors, including ROOT HAIR DEFECTIVE 6 (RHD6) and RHD6-LIKE 1 (RSL1), which regulate RH development via RHD6-LIKE 4 (RSL4) and RHD6-LIKE 2 (RSL2).
-· M25 can partially circumvent the lack of RHD6 but requires RSL1 and the downstream transcription factors RSL2 and RSL4 to induce RH growth.</a:t>
-            </a:r>
-          </a:p>
-        </p:txBody>
-      </p:sp>
-    </p:spTree>
-  </p:cSld>
-  <p:clrMapOvr>
-    <a:masterClrMapping/>
-  </p:clrMapOvr>
-</p:sld>
-</file>
-
-<file path=ppt/slides/slide8.xml><?xml version="1.0" encoding="utf-8"?>
-<p:sld xmlns:a="http://schemas.openxmlformats.org/drawingml/2006/main" xmlns:p="http://schemas.openxmlformats.org/presentationml/2006/main" xmlns:r="http://schemas.openxmlformats.org/officeDocument/2006/relationships">
-  <p:cSld>
-    <p:bg>
-      <p:bgPr>
-        <a:solidFill>
-          <a:srgbClr val="12142A"/>
-        </a:solidFill>
-        <a:effectLst/>
-      </p:bgPr>
-    </p:bg>
-    <p:spTree>
-      <p:nvGrpSpPr>
-        <p:cNvPr id="1" name=""/>
-        <p:cNvGrpSpPr/>
-        <p:nvPr/>
-      </p:nvGrpSpPr>
-      <p:grpSpPr/>
-      <p:sp>
-        <p:nvSpPr>
-          <p:cNvPr id="2" name="TextBox 1"/>
-          <p:cNvSpPr txBox="1"/>
-          <p:nvPr/>
-        </p:nvSpPr>
-        <p:spPr>
-          <a:xfrm>
-            <a:off x="365760" y="457200"/>
-            <a:ext cx="4828032" cy="457200"/>
-          </a:xfrm>
-          <a:prstGeom prst="rect">
-            <a:avLst/>
-          </a:prstGeom>
-          <a:noFill/>
-        </p:spPr>
-        <p:txBody>
-          <a:bodyPr wrap="square" anchor="ctr">
-            <a:spAutoFit/>
-          </a:bodyPr>
-          <a:lstStyle/>
-          <a:p>
-            <a:pPr algn="l"/>
-            <a:r>
-              <a:rPr sz="1600" b="1">
-                <a:solidFill>
-                  <a:srgbClr val="FF6B6B"/>
-                </a:solidFill>
-                <a:latin typeface="Arial"/>
-              </a:rPr>
-              <a:t>본문 요약 (편집용)</a:t>
-            </a:r>
-          </a:p>
-        </p:txBody>
-      </p:sp>
-      <p:sp>
-        <p:nvSpPr>
-          <p:cNvPr id="3" name="TextBox 2"/>
-          <p:cNvSpPr txBox="1"/>
-          <p:nvPr/>
-        </p:nvSpPr>
-        <p:spPr>
-          <a:xfrm>
-            <a:off x="365760" y="1097280"/>
-            <a:ext cx="4828032" cy="457200"/>
-          </a:xfrm>
-          <a:prstGeom prst="rect">
-            <a:avLst/>
-          </a:prstGeom>
-          <a:noFill/>
-        </p:spPr>
-        <p:txBody>
-          <a:bodyPr wrap="square" anchor="t">
-            <a:spAutoFit/>
-          </a:bodyPr>
-          <a:lstStyle/>
-          <a:p>
-            <a:pPr algn="l"/>
-            <a:r>
-              <a:rPr sz="1300" b="1">
-                <a:solidFill>
-                  <a:srgbClr val="FFFFFF"/>
-                </a:solidFill>
-                <a:latin typeface="Arial"/>
-              </a:rPr>
-              <a:t>◆ 결론 — Conclusion (자동 구분)</a:t>
-            </a:r>
-          </a:p>
-        </p:txBody>
-      </p:sp>
-      <p:sp>
-        <p:nvSpPr>
-          <p:cNvPr id="4" name="TextBox 3"/>
-          <p:cNvSpPr txBox="1"/>
-          <p:nvPr/>
-        </p:nvSpPr>
-        <p:spPr>
-          <a:xfrm>
-            <a:off x="457200" y="1600200"/>
-            <a:ext cx="4736592" cy="3566160"/>
-          </a:xfrm>
-          <a:prstGeom prst="rect">
-            <a:avLst/>
-          </a:prstGeom>
-          <a:noFill/>
-        </p:spPr>
-        <p:txBody>
-          <a:bodyPr wrap="square" anchor="t">
-            <a:spAutoFit/>
-          </a:bodyPr>
-          <a:lstStyle/>
-          <a:p>
-            <a:pPr algn="l"/>
-            <a:r>
-              <a:rPr sz="1000" b="0">
-                <a:solidFill>
-                  <a:srgbClr val="D5D8EA"/>
-                </a:solidFill>
-                <a:latin typeface="Arial"/>
-              </a:rPr>
-              <a:t>· These findings indicate that this bacterium can circumvent RHD6 to activate RSL4, which subsequently promotes RH growth.</a:t>
-            </a:r>
-          </a:p>
-        </p:txBody>
-      </p:sp>
-    </p:spTree>
-  </p:cSld>
-  <p:clrMapOvr>
-    <a:masterClrMapping/>
-  </p:clrMapOvr>
-</p:sld>
-</file>
-
-<file path=ppt/slides/slide9.xml><?xml version="1.0" encoding="utf-8"?>
-<p:sld xmlns:a="http://schemas.openxmlformats.org/drawingml/2006/main" xmlns:p="http://schemas.openxmlformats.org/presentationml/2006/main" xmlns:r="http://schemas.openxmlformats.org/officeDocument/2006/relationships">
-  <p:cSld>
-    <p:bg>
-      <p:bgPr>
-        <a:solidFill>
-          <a:srgbClr val="12142A"/>
-        </a:solidFill>
-        <a:effectLst/>
-      </p:bgPr>
-    </p:bg>
-    <p:spTree>
-      <p:nvGrpSpPr>
-        <p:cNvPr id="1" name=""/>
-        <p:cNvGrpSpPr/>
-        <p:nvPr/>
-      </p:nvGrpSpPr>
-      <p:grpSpPr/>
-      <p:sp>
-        <p:nvSpPr>
-          <p:cNvPr id="2" name="TextBox 1"/>
-          <p:cNvSpPr txBox="1"/>
-          <p:nvPr/>
-        </p:nvSpPr>
-        <p:spPr>
-          <a:xfrm>
             <a:off x="365760" y="731520"/>
             <a:ext cx="4828032" cy="548640"/>
           </a:xfrm>
@@ -5222,9 +4522,9 @@
                 <a:latin typeface="Arial"/>
               </a:rPr>
               <a:t>[출처]
-논문: Enhanced drought tolerance in Arabidopsis thaliana is mediated by Pseudomonas sp. M25 linked to root hair growth
-게재: Plant physiology and biochemistry : PPB
-원문: https://pubmed.ncbi.nlm.nih.gov/42727487/
+논문: [에이피알] 에이피알, 고주파 미세천공 기술 기반 탈모 치료 효능 연구 국제 학술지 게재 - 에이피알 공식 블로그
+게재: 에이피알 공식 블로그
+원문: https://news.google.com/rss/articles/CBMiVkFVX3lxTE1JOUNhZmMySXp6dFpKZC1ZU3ZGdmtXVExtMVlyWlU2Y2FWa3BRQWREek9mY3pKTWhkZXNPSm04cjdhVVVUZXZzNTZEeU1UVnZ1MGJPTDRn?oc=5
 [이미지 출처]
 - Male pattern baldness.jpg / Originally uploaded by Lkinkade (Transferred by XenonX3) / CC BY-SA 2.5
   https://commons.wikimedia.org/wiki/File:Male_pattern_baldness.jpg

--- a/data/2026-09-13/slides.pptx
+++ b/data/2026-09-13/slides.pptx
@@ -11,6 +11,9 @@
     <p:sldId id="259" r:id="rId11"/>
     <p:sldId id="260" r:id="rId12"/>
     <p:sldId id="261" r:id="rId13"/>
+    <p:sldId id="262" r:id="rId14"/>
+    <p:sldId id="263" r:id="rId15"/>
+    <p:sldId id="264" r:id="rId16"/>
   </p:sldIdLst>
   <p:sldSz cx="5559552" cy="9875520" type="screen4x3"/>
   <p:notesSz cx="6858000" cy="9144000"/>
@@ -512,7 +515,7 @@
           </a:p>
           <a:p>
             <a:r>
-              <a:t>대본: 탈모 뉴스 오늘 나온 소식을 3줄로 정리했습니다</a:t>
+              <a:t>대본: 줄기세포 오늘 나온 최신 연구를 정리했습니다</a:t>
             </a:r>
           </a:p>
           <a:p>
@@ -592,7 +595,7 @@
           </a:p>
           <a:p>
             <a:r>
-              <a:t>대본: [에이피알] 에이피알, 고주파 미세천공 기술 기반 탈모 치료 효능 연구 국제 학술지 게재 - 에이피알 공식 블로그</a:t>
+              <a:t>대본: 《Cell communication and signaling : CCS》 - Aging of hair follicle stem cells and their niche: mechanisms and regenerative therapeutic strategies</a:t>
             </a:r>
           </a:p>
           <a:p>
@@ -672,7 +675,7 @@
           </a:p>
           <a:p>
             <a:r>
-              <a:t>대본: [에이피알] 에이피알, 고주파 미세천공 기술 기반 탈모 치료 효능 연구 국제 학술지 게재&amp;nbsp;&amp;nbsp;에이피알 공식 블로그</a:t>
+              <a:t>대본: Hair follicles (HFs) are vital skin appendages that perform fundamental functions including protection, thermoregulation, and sensation.</a:t>
             </a:r>
           </a:p>
           <a:p>
@@ -747,17 +750,17 @@
           <a:lstStyle/>
           <a:p>
             <a:r>
-              <a:t>[my_take] 약 10초</a:t>
-            </a:r>
-          </a:p>
-          <a:p>
-            <a:r>
-              <a:t>대본: 탈모 연구, 매일 쉽게 정리해드립니다 🙂</a:t>
-            </a:r>
-          </a:p>
-          <a:p>
-            <a:r>
-              <a:t>연출 노트: 본인 사진 + 코멘트. 문구를 직접 바꿔 쓰세요.</a:t>
+              <a:t>[key_finding_2] 약 10초</a:t>
+            </a:r>
+          </a:p>
+          <a:p>
+            <a:r>
+              <a:t>대본: Orchestrated by hair follicle stem cells (HFSCs), HFs undergo cyclic regeneration throughout the lifespan.</a:t>
+            </a:r>
+          </a:p>
+          <a:p>
+            <a:r>
+              <a:t>연출 노트: 핵심 포인트 2.</a:t>
             </a:r>
           </a:p>
         </p:txBody>
@@ -827,17 +830,247 @@
           <a:lstStyle/>
           <a:p>
             <a:r>
+              <a:t>[my_take] 약 10초</a:t>
+            </a:r>
+          </a:p>
+          <a:p>
+            <a:r>
+              <a:t>대본: 탈모 연구, 매일 쉽게 정리해드립니다 🙂</a:t>
+            </a:r>
+          </a:p>
+          <a:p>
+            <a:r>
+              <a:t>연출 노트: 본인 사진 + 코멘트. 문구를 직접 바꿔 쓰세요.</a:t>
+            </a:r>
+          </a:p>
+        </p:txBody>
+      </p:sp>
+      <p:sp>
+        <p:nvSpPr>
+          <p:cNvPr id="4" name="Slide Number Placeholder 3"/>
+          <p:cNvSpPr>
+            <a:spLocks noGrp="1"/>
+          </p:cNvSpPr>
+          <p:nvPr>
+            <p:ph type="sldNum" idx="5" sz="quarter"/>
+          </p:nvPr>
+        </p:nvSpPr>
+        <p:spPr/>
+      </p:sp>
+    </p:spTree>
+  </p:cSld>
+  <p:clrMapOvr>
+    <a:masterClrMapping/>
+  </p:clrMapOvr>
+</p:notes>
+</file>
+
+<file path=ppt/notesSlides/notesSlide6.xml><?xml version="1.0" encoding="utf-8"?>
+<p:notes xmlns:a="http://schemas.openxmlformats.org/drawingml/2006/main" xmlns:p="http://schemas.openxmlformats.org/presentationml/2006/main" xmlns:r="http://schemas.openxmlformats.org/officeDocument/2006/relationships">
+  <p:cSld>
+    <p:spTree>
+      <p:nvGrpSpPr>
+        <p:cNvPr id="1" name=""/>
+        <p:cNvGrpSpPr/>
+        <p:nvPr/>
+      </p:nvGrpSpPr>
+      <p:grpSpPr>
+        <a:xfrm>
+          <a:off x="0" y="0"/>
+          <a:ext cx="0" cy="0"/>
+          <a:chOff x="0" y="0"/>
+          <a:chExt cx="0" cy="0"/>
+        </a:xfrm>
+      </p:grpSpPr>
+      <p:sp>
+        <p:nvSpPr>
+          <p:cNvPr id="2" name="Slide Image Placeholder 1"/>
+          <p:cNvSpPr>
+            <a:spLocks noGrp="1"/>
+          </p:cNvSpPr>
+          <p:nvPr>
+            <p:ph type="sldImg" idx="2"/>
+          </p:nvPr>
+        </p:nvSpPr>
+        <p:spPr/>
+      </p:sp>
+      <p:sp>
+        <p:nvSpPr>
+          <p:cNvPr id="3" name="Notes Placeholder 2"/>
+          <p:cNvSpPr>
+            <a:spLocks noGrp="1"/>
+          </p:cNvSpPr>
+          <p:nvPr>
+            <p:ph type="body" idx="3" sz="quarter"/>
+          </p:nvPr>
+        </p:nvSpPr>
+        <p:spPr/>
+        <p:txBody>
+          <a:bodyPr/>
+          <a:lstStyle/>
+          <a:p>
+            <a:r>
               <a:t>[cta] 약 8초</a:t>
             </a:r>
           </a:p>
           <a:p>
             <a:r>
-              <a:t>대본: 원문은 링크에서 확인하세요. 매일 새로운 탈모 소식, 놓치지 마세요!</a:t>
+              <a:t>대본: 더 자세한 내용은 원문 링크에서 확인하세요. 매일 새로운 탈모 연구, 팔로우하고 놓치지 마세요!</a:t>
             </a:r>
           </a:p>
           <a:p>
             <a:r>
               <a:t>연출 노트: 원문 링크는 고정 댓글로 안내.</a:t>
+            </a:r>
+          </a:p>
+        </p:txBody>
+      </p:sp>
+      <p:sp>
+        <p:nvSpPr>
+          <p:cNvPr id="4" name="Slide Number Placeholder 3"/>
+          <p:cNvSpPr>
+            <a:spLocks noGrp="1"/>
+          </p:cNvSpPr>
+          <p:nvPr>
+            <p:ph type="sldNum" idx="5" sz="quarter"/>
+          </p:nvPr>
+        </p:nvSpPr>
+        <p:spPr/>
+      </p:sp>
+    </p:spTree>
+  </p:cSld>
+  <p:clrMapOvr>
+    <a:masterClrMapping/>
+  </p:clrMapOvr>
+</p:notes>
+</file>
+
+<file path=ppt/notesSlides/notesSlide7.xml><?xml version="1.0" encoding="utf-8"?>
+<p:notes xmlns:a="http://schemas.openxmlformats.org/drawingml/2006/main" xmlns:p="http://schemas.openxmlformats.org/presentationml/2006/main" xmlns:r="http://schemas.openxmlformats.org/officeDocument/2006/relationships">
+  <p:cSld>
+    <p:spTree>
+      <p:nvGrpSpPr>
+        <p:cNvPr id="1" name=""/>
+        <p:cNvGrpSpPr/>
+        <p:nvPr/>
+      </p:nvGrpSpPr>
+      <p:grpSpPr>
+        <a:xfrm>
+          <a:off x="0" y="0"/>
+          <a:ext cx="0" cy="0"/>
+          <a:chOff x="0" y="0"/>
+          <a:chExt cx="0" cy="0"/>
+        </a:xfrm>
+      </p:grpSpPr>
+      <p:sp>
+        <p:nvSpPr>
+          <p:cNvPr id="2" name="Slide Image Placeholder 1"/>
+          <p:cNvSpPr>
+            <a:spLocks noGrp="1"/>
+          </p:cNvSpPr>
+          <p:nvPr>
+            <p:ph type="sldImg" idx="2"/>
+          </p:nvPr>
+        </p:nvSpPr>
+        <p:spPr/>
+      </p:sp>
+      <p:sp>
+        <p:nvSpPr>
+          <p:cNvPr id="3" name="Notes Placeholder 2"/>
+          <p:cNvSpPr>
+            <a:spLocks noGrp="1"/>
+          </p:cNvSpPr>
+          <p:nvPr>
+            <p:ph type="body" idx="3" sz="quarter"/>
+          </p:nvPr>
+        </p:nvSpPr>
+        <p:spPr/>
+        <p:txBody>
+          <a:bodyPr/>
+          <a:lstStyle/>
+          <a:p>
+            <a:r>
+              <a:t>편집 참고용 슬라이드입니다. 영상에는 쓰지 않아도 됩니다.</a:t>
+            </a:r>
+          </a:p>
+          <a:p>
+            <a:r>
+              <a:t>원문 영어 문장을 그대로 발췌했으므로 번역·검수 후 사용하세요.</a:t>
+            </a:r>
+          </a:p>
+        </p:txBody>
+      </p:sp>
+      <p:sp>
+        <p:nvSpPr>
+          <p:cNvPr id="4" name="Slide Number Placeholder 3"/>
+          <p:cNvSpPr>
+            <a:spLocks noGrp="1"/>
+          </p:cNvSpPr>
+          <p:nvPr>
+            <p:ph type="sldNum" idx="5" sz="quarter"/>
+          </p:nvPr>
+        </p:nvSpPr>
+        <p:spPr/>
+      </p:sp>
+    </p:spTree>
+  </p:cSld>
+  <p:clrMapOvr>
+    <a:masterClrMapping/>
+  </p:clrMapOvr>
+</p:notes>
+</file>
+
+<file path=ppt/notesSlides/notesSlide8.xml><?xml version="1.0" encoding="utf-8"?>
+<p:notes xmlns:a="http://schemas.openxmlformats.org/drawingml/2006/main" xmlns:p="http://schemas.openxmlformats.org/presentationml/2006/main" xmlns:r="http://schemas.openxmlformats.org/officeDocument/2006/relationships">
+  <p:cSld>
+    <p:spTree>
+      <p:nvGrpSpPr>
+        <p:cNvPr id="1" name=""/>
+        <p:cNvGrpSpPr/>
+        <p:nvPr/>
+      </p:nvGrpSpPr>
+      <p:grpSpPr>
+        <a:xfrm>
+          <a:off x="0" y="0"/>
+          <a:ext cx="0" cy="0"/>
+          <a:chOff x="0" y="0"/>
+          <a:chExt cx="0" cy="0"/>
+        </a:xfrm>
+      </p:grpSpPr>
+      <p:sp>
+        <p:nvSpPr>
+          <p:cNvPr id="2" name="Slide Image Placeholder 1"/>
+          <p:cNvSpPr>
+            <a:spLocks noGrp="1"/>
+          </p:cNvSpPr>
+          <p:nvPr>
+            <p:ph type="sldImg" idx="2"/>
+          </p:nvPr>
+        </p:nvSpPr>
+        <p:spPr/>
+      </p:sp>
+      <p:sp>
+        <p:nvSpPr>
+          <p:cNvPr id="3" name="Notes Placeholder 2"/>
+          <p:cNvSpPr>
+            <a:spLocks noGrp="1"/>
+          </p:cNvSpPr>
+          <p:nvPr>
+            <p:ph type="body" idx="3" sz="quarter"/>
+          </p:nvPr>
+        </p:nvSpPr>
+        <p:spPr/>
+        <p:txBody>
+          <a:bodyPr/>
+          <a:lstStyle/>
+          <a:p>
+            <a:r>
+              <a:t>편집 참고용 슬라이드입니다. 영상에는 쓰지 않아도 됩니다.</a:t>
+            </a:r>
+          </a:p>
+          <a:p>
+            <a:r>
+              <a:t>원문 영어 문장을 그대로 발췌했으므로 번역·검수 후 사용하세요.</a:t>
             </a:r>
           </a:p>
         </p:txBody>
@@ -3881,7 +4114,7 @@
                 </a:solidFill>
                 <a:latin typeface="Arial"/>
               </a:rPr>
-              <a:t>에이피알 공식 블로그</a:t>
+              <a:t>CELL COMMUNICATION AND SIGNALING : CCS</a:t>
             </a:r>
           </a:p>
         </p:txBody>
@@ -3916,7 +4149,7 @@
                 </a:solidFill>
                 <a:latin typeface="Arial"/>
               </a:rPr>
-              <a:t>탈모 뉴스</a:t>
+              <a:t>줄기세포</a:t>
             </a:r>
           </a:p>
         </p:txBody>
@@ -3951,7 +4184,7 @@
                 </a:solidFill>
                 <a:latin typeface="Arial"/>
               </a:rPr>
-              <a:t>오늘 나온 소식을 3줄로 정리했습니다</a:t>
+              <a:t>오늘 나온 최신 연구를 정리했습니다</a:t>
             </a:r>
           </a:p>
         </p:txBody>
@@ -3986,7 +4219,7 @@
                 </a:solidFill>
                 <a:latin typeface="Arial"/>
               </a:rPr>
-              <a:t>Sat, 12 Sep 2026 23:08:16 GMT  |  매일 아침 탈모 연구 한 편</a:t>
+              <a:t>2026 Jul 27  |  매일 아침 탈모 연구 한 편</a:t>
             </a:r>
           </a:p>
         </p:txBody>
@@ -4071,7 +4304,7 @@
                 </a:solidFill>
                 <a:latin typeface="Arial"/>
               </a:rPr>
-              <a:t>[에이피알] 에이피알, 고주파 미세천공 기술 기반 탈모 치료 효능 연구 국제 학술지 게재 - 에이피알 공식 블로그</a:t>
+              <a:t>Aging of hair follicle stem cells and their niche: mechanisms and regenerative therapeutic strategies</a:t>
             </a:r>
           </a:p>
         </p:txBody>
@@ -4106,7 +4339,7 @@
                 </a:solidFill>
                 <a:latin typeface="Arial"/>
               </a:rPr>
-              <a:t>  ·  Sat, 12 Sep 2026 23:08:16 GMT</a:t>
+              <a:t>Cell communication and signaling : CCS  ·  2026 Jul 27</a:t>
             </a:r>
           </a:p>
         </p:txBody>
@@ -4235,7 +4468,7 @@
                 </a:solidFill>
                 <a:latin typeface="Arial"/>
               </a:rPr>
-              <a:t>[에이피알] 에이피알, 고주파 미세천공 기술 기반 탈모 치료 효능 연구 국제 학술지 게재&amp;nbsp;&amp;nbsp;에이피알 공식 블로그</a:t>
+              <a:t>Hair follicles (HFs) are vital skin appendages that perform fundamental functions including protection, thermoregulation, and sensation.</a:t>
             </a:r>
           </a:p>
         </p:txBody>
@@ -4249,6 +4482,135 @@
 </file>
 
 <file path=ppt/slides/slide4.xml><?xml version="1.0" encoding="utf-8"?>
+<p:sld xmlns:a="http://schemas.openxmlformats.org/drawingml/2006/main" xmlns:p="http://schemas.openxmlformats.org/presentationml/2006/main" xmlns:r="http://schemas.openxmlformats.org/officeDocument/2006/relationships">
+  <p:cSld>
+    <p:bg>
+      <p:bgPr>
+        <a:solidFill>
+          <a:srgbClr val="1B1F3B"/>
+        </a:solidFill>
+        <a:effectLst/>
+      </p:bgPr>
+    </p:bg>
+    <p:spTree>
+      <p:nvGrpSpPr>
+        <p:cNvPr id="1" name=""/>
+        <p:cNvGrpSpPr/>
+        <p:nvPr/>
+      </p:nvGrpSpPr>
+      <p:grpSpPr/>
+      <p:pic>
+        <p:nvPicPr>
+          <p:cNvPr id="2" name="Picture 1" descr="topic_2.jpg"/>
+          <p:cNvPicPr>
+            <a:picLocks noChangeAspect="1"/>
+          </p:cNvPicPr>
+          <p:nvPr/>
+        </p:nvPicPr>
+        <p:blipFill>
+          <a:blip r:embed="rId2"/>
+          <a:stretch>
+            <a:fillRect/>
+          </a:stretch>
+        </p:blipFill>
+        <p:spPr>
+          <a:xfrm>
+            <a:off x="-923544" y="0"/>
+            <a:ext cx="7406640" cy="9875520"/>
+          </a:xfrm>
+          <a:prstGeom prst="rect">
+            <a:avLst/>
+          </a:prstGeom>
+        </p:spPr>
+      </p:pic>
+      <p:sp>
+        <p:nvSpPr>
+          <p:cNvPr id="3" name="Rectangle 2"/>
+          <p:cNvSpPr/>
+          <p:nvPr/>
+        </p:nvSpPr>
+        <p:spPr>
+          <a:xfrm>
+            <a:off x="0" y="6122822"/>
+            <a:ext cx="5559552" cy="3752698"/>
+          </a:xfrm>
+          <a:prstGeom prst="rect">
+            <a:avLst/>
+          </a:prstGeom>
+          <a:solidFill>
+            <a:srgbClr val="000000"/>
+          </a:solidFill>
+          <a:ln>
+            <a:noFill/>
+          </a:ln>
+          <a:effectLst/>
+        </p:spPr>
+        <p:style>
+          <a:lnRef idx="1">
+            <a:schemeClr val="accent1"/>
+          </a:lnRef>
+          <a:fillRef idx="3">
+            <a:schemeClr val="accent1"/>
+          </a:fillRef>
+          <a:effectRef idx="2">
+            <a:schemeClr val="accent1"/>
+          </a:effectRef>
+          <a:fontRef idx="minor">
+            <a:schemeClr val="lt1"/>
+          </a:fontRef>
+        </p:style>
+        <p:txBody>
+          <a:bodyPr rtlCol="0" anchor="ctr"/>
+          <a:lstStyle/>
+          <a:p>
+            <a:pPr algn="ctr"/>
+          </a:p>
+        </p:txBody>
+      </p:sp>
+      <p:sp>
+        <p:nvSpPr>
+          <p:cNvPr id="4" name="TextBox 3"/>
+          <p:cNvSpPr txBox="1"/>
+          <p:nvPr/>
+        </p:nvSpPr>
+        <p:spPr>
+          <a:xfrm>
+            <a:off x="365760" y="6400800"/>
+            <a:ext cx="4828032" cy="2926080"/>
+          </a:xfrm>
+          <a:prstGeom prst="rect">
+            <a:avLst/>
+          </a:prstGeom>
+          <a:noFill/>
+        </p:spPr>
+        <p:txBody>
+          <a:bodyPr wrap="square" anchor="ctr">
+            <a:spAutoFit/>
+          </a:bodyPr>
+          <a:lstStyle/>
+          <a:p>
+            <a:pPr algn="ctr"/>
+            <a:r>
+              <a:rPr sz="2200" b="1">
+                <a:solidFill>
+                  <a:srgbClr val="FFFFFF"/>
+                </a:solidFill>
+                <a:latin typeface="Arial"/>
+              </a:rPr>
+              <a:t>Orchestrated by hair follicle stem cells (HFSCs), HFs undergo cyclic regeneration throughout the lifespan.</a:t>
+            </a:r>
+          </a:p>
+        </p:txBody>
+      </p:sp>
+    </p:spTree>
+  </p:cSld>
+  <p:clrMapOvr>
+    <a:masterClrMapping/>
+  </p:clrMapOvr>
+</p:sld>
+</file>
+
+<file path=ppt/slides/slide5.xml><?xml version="1.0" encoding="utf-8"?>
 <p:sld xmlns:a="http://schemas.openxmlformats.org/drawingml/2006/main" xmlns:p="http://schemas.openxmlformats.org/presentationml/2006/main" xmlns:r="http://schemas.openxmlformats.org/officeDocument/2006/relationships">
   <p:cSld>
     <p:bg>
@@ -4377,7 +4739,7 @@
 </p:sld>
 </file>
 
-<file path=ppt/slides/slide5.xml><?xml version="1.0" encoding="utf-8"?>
+<file path=ppt/slides/slide6.xml><?xml version="1.0" encoding="utf-8"?>
 <p:sld xmlns:a="http://schemas.openxmlformats.org/drawingml/2006/main" xmlns:p="http://schemas.openxmlformats.org/presentationml/2006/main" xmlns:r="http://schemas.openxmlformats.org/officeDocument/2006/relationships">
   <p:cSld>
     <p:bg>
@@ -4425,7 +4787,7 @@
                 </a:solidFill>
                 <a:latin typeface="Arial"/>
               </a:rPr>
-              <a:t>원문은 링크에서 확인하세요. 매일 새로운 탈모 소식, 놓치지 마세요!</a:t>
+              <a:t>더 자세한 내용은 원문 링크에서 확인하세요. 매일 새로운 탈모 연구, 팔로우하고 놓치지 마세요!</a:t>
             </a:r>
           </a:p>
         </p:txBody>
@@ -4438,7 +4800,7 @@
 </p:sld>
 </file>
 
-<file path=ppt/slides/slide6.xml><?xml version="1.0" encoding="utf-8"?>
+<file path=ppt/slides/slide7.xml><?xml version="1.0" encoding="utf-8"?>
 <p:sld xmlns:a="http://schemas.openxmlformats.org/drawingml/2006/main" xmlns:p="http://schemas.openxmlformats.org/presentationml/2006/main" xmlns:r="http://schemas.openxmlformats.org/officeDocument/2006/relationships">
   <p:cSld>
     <p:bg>
@@ -4464,6 +4826,413 @@
         </p:nvSpPr>
         <p:spPr>
           <a:xfrm>
+            <a:off x="365760" y="457200"/>
+            <a:ext cx="4828032" cy="457200"/>
+          </a:xfrm>
+          <a:prstGeom prst="rect">
+            <a:avLst/>
+          </a:prstGeom>
+          <a:noFill/>
+        </p:spPr>
+        <p:txBody>
+          <a:bodyPr wrap="square" anchor="ctr">
+            <a:spAutoFit/>
+          </a:bodyPr>
+          <a:lstStyle/>
+          <a:p>
+            <a:pPr algn="l"/>
+            <a:r>
+              <a:rPr sz="1600" b="1">
+                <a:solidFill>
+                  <a:srgbClr val="FF6B6B"/>
+                </a:solidFill>
+                <a:latin typeface="Arial"/>
+              </a:rPr>
+              <a:t>본문 요약 (편집용)</a:t>
+            </a:r>
+          </a:p>
+        </p:txBody>
+      </p:sp>
+      <p:sp>
+        <p:nvSpPr>
+          <p:cNvPr id="3" name="TextBox 2"/>
+          <p:cNvSpPr txBox="1"/>
+          <p:nvPr/>
+        </p:nvSpPr>
+        <p:spPr>
+          <a:xfrm>
+            <a:off x="365760" y="1097280"/>
+            <a:ext cx="4828032" cy="457200"/>
+          </a:xfrm>
+          <a:prstGeom prst="rect">
+            <a:avLst/>
+          </a:prstGeom>
+          <a:noFill/>
+        </p:spPr>
+        <p:txBody>
+          <a:bodyPr wrap="square" anchor="t">
+            <a:spAutoFit/>
+          </a:bodyPr>
+          <a:lstStyle/>
+          <a:p>
+            <a:pPr algn="l"/>
+            <a:r>
+              <a:rPr sz="1300" b="1">
+                <a:solidFill>
+                  <a:srgbClr val="FFFFFF"/>
+                </a:solidFill>
+                <a:latin typeface="Arial"/>
+              </a:rPr>
+              <a:t>◆ 배경 — Background (자동 구분)</a:t>
+            </a:r>
+          </a:p>
+        </p:txBody>
+      </p:sp>
+      <p:sp>
+        <p:nvSpPr>
+          <p:cNvPr id="4" name="TextBox 3"/>
+          <p:cNvSpPr txBox="1"/>
+          <p:nvPr/>
+        </p:nvSpPr>
+        <p:spPr>
+          <a:xfrm>
+            <a:off x="457200" y="1600200"/>
+            <a:ext cx="4736592" cy="3566160"/>
+          </a:xfrm>
+          <a:prstGeom prst="rect">
+            <a:avLst/>
+          </a:prstGeom>
+          <a:noFill/>
+        </p:spPr>
+        <p:txBody>
+          <a:bodyPr wrap="square" anchor="t">
+            <a:spAutoFit/>
+          </a:bodyPr>
+          <a:lstStyle/>
+          <a:p>
+            <a:pPr algn="l"/>
+            <a:r>
+              <a:rPr sz="1000" b="0">
+                <a:solidFill>
+                  <a:srgbClr val="D5D8EA"/>
+                </a:solidFill>
+                <a:latin typeface="Arial"/>
+              </a:rPr>
+              <a:t>· Hair follicles (HFs) are vital skin appendages that perform fundamental functions including protection, thermoregulation, and sensation.
+· Orchestrated by hair follicle stem cells (HFSCs), HFs undergo cyclic regeneration throughout the lifespan.
+· However, during chronological aging, this mini-organ experiences progressive physiological decline, clinically characterized by a marked reduction in hair density and hair graying due to pigmentation dysfunction.</a:t>
+            </a:r>
+          </a:p>
+        </p:txBody>
+      </p:sp>
+      <p:sp>
+        <p:nvSpPr>
+          <p:cNvPr id="5" name="TextBox 4"/>
+          <p:cNvSpPr txBox="1"/>
+          <p:nvPr/>
+        </p:nvSpPr>
+        <p:spPr>
+          <a:xfrm>
+            <a:off x="365760" y="5303520"/>
+            <a:ext cx="4828032" cy="457200"/>
+          </a:xfrm>
+          <a:prstGeom prst="rect">
+            <a:avLst/>
+          </a:prstGeom>
+          <a:noFill/>
+        </p:spPr>
+        <p:txBody>
+          <a:bodyPr wrap="square" anchor="t">
+            <a:spAutoFit/>
+          </a:bodyPr>
+          <a:lstStyle/>
+          <a:p>
+            <a:pPr algn="l"/>
+            <a:r>
+              <a:rPr sz="1300" b="1">
+                <a:solidFill>
+                  <a:srgbClr val="FFFFFF"/>
+                </a:solidFill>
+                <a:latin typeface="Arial"/>
+              </a:rPr>
+              <a:t>◆ 연구 방법 — Methods (자동 구분)</a:t>
+            </a:r>
+          </a:p>
+        </p:txBody>
+      </p:sp>
+      <p:sp>
+        <p:nvSpPr>
+          <p:cNvPr id="6" name="TextBox 5"/>
+          <p:cNvSpPr txBox="1"/>
+          <p:nvPr/>
+        </p:nvSpPr>
+        <p:spPr>
+          <a:xfrm>
+            <a:off x="457200" y="5806440"/>
+            <a:ext cx="4736592" cy="3566160"/>
+          </a:xfrm>
+          <a:prstGeom prst="rect">
+            <a:avLst/>
+          </a:prstGeom>
+          <a:noFill/>
+        </p:spPr>
+        <p:txBody>
+          <a:bodyPr wrap="square" anchor="t">
+            <a:spAutoFit/>
+          </a:bodyPr>
+          <a:lstStyle/>
+          <a:p>
+            <a:pPr algn="l"/>
+            <a:r>
+              <a:rPr sz="1000" b="0">
+                <a:solidFill>
+                  <a:srgbClr val="D5D8EA"/>
+                </a:solidFill>
+                <a:latin typeface="Arial"/>
+              </a:rPr>
+              <a:t>· In this review, we delineate the dynamic anatomical changes throughout the hair growth cycle and describe the alterations of HFSCs during aging.</a:t>
+            </a:r>
+          </a:p>
+        </p:txBody>
+      </p:sp>
+    </p:spTree>
+  </p:cSld>
+  <p:clrMapOvr>
+    <a:masterClrMapping/>
+  </p:clrMapOvr>
+</p:sld>
+</file>
+
+<file path=ppt/slides/slide8.xml><?xml version="1.0" encoding="utf-8"?>
+<p:sld xmlns:a="http://schemas.openxmlformats.org/drawingml/2006/main" xmlns:p="http://schemas.openxmlformats.org/presentationml/2006/main" xmlns:r="http://schemas.openxmlformats.org/officeDocument/2006/relationships">
+  <p:cSld>
+    <p:bg>
+      <p:bgPr>
+        <a:solidFill>
+          <a:srgbClr val="12142A"/>
+        </a:solidFill>
+        <a:effectLst/>
+      </p:bgPr>
+    </p:bg>
+    <p:spTree>
+      <p:nvGrpSpPr>
+        <p:cNvPr id="1" name=""/>
+        <p:cNvGrpSpPr/>
+        <p:nvPr/>
+      </p:nvGrpSpPr>
+      <p:grpSpPr/>
+      <p:sp>
+        <p:nvSpPr>
+          <p:cNvPr id="2" name="TextBox 1"/>
+          <p:cNvSpPr txBox="1"/>
+          <p:nvPr/>
+        </p:nvSpPr>
+        <p:spPr>
+          <a:xfrm>
+            <a:off x="365760" y="457200"/>
+            <a:ext cx="4828032" cy="457200"/>
+          </a:xfrm>
+          <a:prstGeom prst="rect">
+            <a:avLst/>
+          </a:prstGeom>
+          <a:noFill/>
+        </p:spPr>
+        <p:txBody>
+          <a:bodyPr wrap="square" anchor="ctr">
+            <a:spAutoFit/>
+          </a:bodyPr>
+          <a:lstStyle/>
+          <a:p>
+            <a:pPr algn="l"/>
+            <a:r>
+              <a:rPr sz="1600" b="1">
+                <a:solidFill>
+                  <a:srgbClr val="FF6B6B"/>
+                </a:solidFill>
+                <a:latin typeface="Arial"/>
+              </a:rPr>
+              <a:t>본문 요약 (편집용)</a:t>
+            </a:r>
+          </a:p>
+        </p:txBody>
+      </p:sp>
+      <p:sp>
+        <p:nvSpPr>
+          <p:cNvPr id="3" name="TextBox 2"/>
+          <p:cNvSpPr txBox="1"/>
+          <p:nvPr/>
+        </p:nvSpPr>
+        <p:spPr>
+          <a:xfrm>
+            <a:off x="365760" y="1097280"/>
+            <a:ext cx="4828032" cy="457200"/>
+          </a:xfrm>
+          <a:prstGeom prst="rect">
+            <a:avLst/>
+          </a:prstGeom>
+          <a:noFill/>
+        </p:spPr>
+        <p:txBody>
+          <a:bodyPr wrap="square" anchor="t">
+            <a:spAutoFit/>
+          </a:bodyPr>
+          <a:lstStyle/>
+          <a:p>
+            <a:pPr algn="l"/>
+            <a:r>
+              <a:rPr sz="1300" b="1">
+                <a:solidFill>
+                  <a:srgbClr val="FFFFFF"/>
+                </a:solidFill>
+                <a:latin typeface="Arial"/>
+              </a:rPr>
+              <a:t>◆ 주요 결과 — Results (자동 구분)</a:t>
+            </a:r>
+          </a:p>
+        </p:txBody>
+      </p:sp>
+      <p:sp>
+        <p:nvSpPr>
+          <p:cNvPr id="4" name="TextBox 3"/>
+          <p:cNvSpPr txBox="1"/>
+          <p:nvPr/>
+        </p:nvSpPr>
+        <p:spPr>
+          <a:xfrm>
+            <a:off x="457200" y="1600200"/>
+            <a:ext cx="4736592" cy="3566160"/>
+          </a:xfrm>
+          <a:prstGeom prst="rect">
+            <a:avLst/>
+          </a:prstGeom>
+          <a:noFill/>
+        </p:spPr>
+        <p:txBody>
+          <a:bodyPr wrap="square" anchor="t">
+            <a:spAutoFit/>
+          </a:bodyPr>
+          <a:lstStyle/>
+          <a:p>
+            <a:pPr algn="l"/>
+            <a:r>
+              <a:rPr sz="1000" b="0">
+                <a:solidFill>
+                  <a:srgbClr val="D5D8EA"/>
+                </a:solidFill>
+                <a:latin typeface="Arial"/>
+              </a:rPr>
+              <a:t>· This aging process involves HFSC exhaustion accompanied by diminished regenerative potential and differentiation capacity, leading to degenerative changes in the bulge architecture.
+· Concurrently, the niche supporting HFSC homeostasis undergoes multi-dimensional and systemic degradation.
+· This niche deterioration disrupts the delicate balance between HFSC quiescence and activation, further impeding hair regeneration.
+· We specifically focus on the mechanisms underlying the multi-dimensional degradation of the HFSC niche at tissue, cellular, and molecular levels.</a:t>
+            </a:r>
+          </a:p>
+        </p:txBody>
+      </p:sp>
+      <p:sp>
+        <p:nvSpPr>
+          <p:cNvPr id="5" name="TextBox 4"/>
+          <p:cNvSpPr txBox="1"/>
+          <p:nvPr/>
+        </p:nvSpPr>
+        <p:spPr>
+          <a:xfrm>
+            <a:off x="365760" y="5303520"/>
+            <a:ext cx="4828032" cy="457200"/>
+          </a:xfrm>
+          <a:prstGeom prst="rect">
+            <a:avLst/>
+          </a:prstGeom>
+          <a:noFill/>
+        </p:spPr>
+        <p:txBody>
+          <a:bodyPr wrap="square" anchor="t">
+            <a:spAutoFit/>
+          </a:bodyPr>
+          <a:lstStyle/>
+          <a:p>
+            <a:pPr algn="l"/>
+            <a:r>
+              <a:rPr sz="1300" b="1">
+                <a:solidFill>
+                  <a:srgbClr val="FFFFFF"/>
+                </a:solidFill>
+                <a:latin typeface="Arial"/>
+              </a:rPr>
+              <a:t>◆ 결론 — Conclusion (자동 구분)</a:t>
+            </a:r>
+          </a:p>
+        </p:txBody>
+      </p:sp>
+      <p:sp>
+        <p:nvSpPr>
+          <p:cNvPr id="6" name="TextBox 5"/>
+          <p:cNvSpPr txBox="1"/>
+          <p:nvPr/>
+        </p:nvSpPr>
+        <p:spPr>
+          <a:xfrm>
+            <a:off x="457200" y="5806440"/>
+            <a:ext cx="4736592" cy="3566160"/>
+          </a:xfrm>
+          <a:prstGeom prst="rect">
+            <a:avLst/>
+          </a:prstGeom>
+          <a:noFill/>
+        </p:spPr>
+        <p:txBody>
+          <a:bodyPr wrap="square" anchor="t">
+            <a:spAutoFit/>
+          </a:bodyPr>
+          <a:lstStyle/>
+          <a:p>
+            <a:pPr algn="l"/>
+            <a:r>
+              <a:rPr sz="1000" b="0">
+                <a:solidFill>
+                  <a:srgbClr val="D5D8EA"/>
+                </a:solidFill>
+                <a:latin typeface="Arial"/>
+              </a:rPr>
+              <a:t>· Furthermore, we discuss various therapeutic strategies aimed at ameliorating HF aging, offering potential insights for future clinical translation in hair regeneration.</a:t>
+            </a:r>
+          </a:p>
+        </p:txBody>
+      </p:sp>
+    </p:spTree>
+  </p:cSld>
+  <p:clrMapOvr>
+    <a:masterClrMapping/>
+  </p:clrMapOvr>
+</p:sld>
+</file>
+
+<file path=ppt/slides/slide9.xml><?xml version="1.0" encoding="utf-8"?>
+<p:sld xmlns:a="http://schemas.openxmlformats.org/drawingml/2006/main" xmlns:p="http://schemas.openxmlformats.org/presentationml/2006/main" xmlns:r="http://schemas.openxmlformats.org/officeDocument/2006/relationships">
+  <p:cSld>
+    <p:bg>
+      <p:bgPr>
+        <a:solidFill>
+          <a:srgbClr val="12142A"/>
+        </a:solidFill>
+        <a:effectLst/>
+      </p:bgPr>
+    </p:bg>
+    <p:spTree>
+      <p:nvGrpSpPr>
+        <p:cNvPr id="1" name=""/>
+        <p:cNvGrpSpPr/>
+        <p:nvPr/>
+      </p:nvGrpSpPr>
+      <p:grpSpPr/>
+      <p:sp>
+        <p:nvSpPr>
+          <p:cNvPr id="2" name="TextBox 1"/>
+          <p:cNvSpPr txBox="1"/>
+          <p:nvPr/>
+        </p:nvSpPr>
+        <p:spPr>
+          <a:xfrm>
             <a:off x="365760" y="731520"/>
             <a:ext cx="4828032" cy="548640"/>
           </a:xfrm>
@@ -4522,9 +5291,9 @@
                 <a:latin typeface="Arial"/>
               </a:rPr>
               <a:t>[출처]
-논문: [에이피알] 에이피알, 고주파 미세천공 기술 기반 탈모 치료 효능 연구 국제 학술지 게재 - 에이피알 공식 블로그
-게재: 에이피알 공식 블로그
-원문: https://news.google.com/rss/articles/CBMiVkFVX3lxTE1JOUNhZmMySXp6dFpKZC1ZU3ZGdmtXVExtMVlyWlU2Y2FWa3BRQWREek9mY3pKTWhkZXNPSm04cjdhVVVUZXZzNTZEeU1UVnZ1MGJPTDRn?oc=5
+논문: Aging of hair follicle stem cells and their niche: mechanisms and regenerative therapeutic strategies
+게재: Cell communication and signaling : CCS
+원문: https://pubmed.ncbi.nlm.nih.gov/42723052/
 [이미지 출처]
 - Male pattern baldness.jpg / Originally uploaded by Lkinkade (Transferred by XenonX3) / CC BY-SA 2.5
   https://commons.wikimedia.org/wiki/File:Male_pattern_baldness.jpg
